--- a/media/module5/slides.pptx
+++ b/media/module5/slides.pptx
@@ -64,6 +64,17 @@
     <p:sldId id="312" r:id="rId64"/>
     <p:sldId id="313" r:id="rId65"/>
     <p:sldId id="314" r:id="rId66"/>
+    <p:sldId id="315" r:id="rId67"/>
+    <p:sldId id="316" r:id="rId68"/>
+    <p:sldId id="317" r:id="rId69"/>
+    <p:sldId id="318" r:id="rId70"/>
+    <p:sldId id="319" r:id="rId71"/>
+    <p:sldId id="320" r:id="rId72"/>
+    <p:sldId id="321" r:id="rId73"/>
+    <p:sldId id="322" r:id="rId74"/>
+    <p:sldId id="323" r:id="rId75"/>
+    <p:sldId id="324" r:id="rId76"/>
+    <p:sldId id="325" r:id="rId77"/>
   </p:sldIdLst>
   <p:sldSz cx="12191695" cy="6858000" type="screen4x3"/>
   <p:notesSz cx="6858000" cy="9144000"/>
@@ -3455,6 +3466,146 @@
 </p:notes>
 </file>
 
+<file path=ppt/notesSlides/notesSlide48.xml><?xml version="1.0" encoding="utf-8"?>
+<p:notes xmlns:a="http://schemas.openxmlformats.org/drawingml/2006/main" xmlns:p="http://schemas.openxmlformats.org/presentationml/2006/main" xmlns:r="http://schemas.openxmlformats.org/officeDocument/2006/relationships">
+  <p:cSld>
+    <p:spTree>
+      <p:nvGrpSpPr>
+        <p:cNvPr id="1" name=""/>
+        <p:cNvGrpSpPr/>
+        <p:nvPr/>
+      </p:nvGrpSpPr>
+      <p:grpSpPr>
+        <a:xfrm>
+          <a:off x="0" y="0"/>
+          <a:ext cx="0" cy="0"/>
+          <a:chOff x="0" y="0"/>
+          <a:chExt cx="0" cy="0"/>
+        </a:xfrm>
+      </p:grpSpPr>
+      <p:sp>
+        <p:nvSpPr>
+          <p:cNvPr id="2" name="Slide Image Placeholder 1"/>
+          <p:cNvSpPr>
+            <a:spLocks noGrp="1"/>
+          </p:cNvSpPr>
+          <p:nvPr>
+            <p:ph type="sldImg" idx="2"/>
+          </p:nvPr>
+        </p:nvSpPr>
+        <p:spPr/>
+      </p:sp>
+      <p:sp>
+        <p:nvSpPr>
+          <p:cNvPr id="3" name="Notes Placeholder 2"/>
+          <p:cNvSpPr>
+            <a:spLocks noGrp="1"/>
+          </p:cNvSpPr>
+          <p:nvPr>
+            <p:ph type="body" idx="3" sz="quarter"/>
+          </p:nvPr>
+        </p:nvSpPr>
+        <p:spPr/>
+        <p:txBody>
+          <a:bodyPr/>
+          <a:lstStyle/>
+          <a:p>
+            <a:r>
+              <a:t>module5/examples/virtual_sequences/README.md</a:t>
+            </a:r>
+          </a:p>
+        </p:txBody>
+      </p:sp>
+      <p:sp>
+        <p:nvSpPr>
+          <p:cNvPr id="4" name="Slide Number Placeholder 3"/>
+          <p:cNvSpPr>
+            <a:spLocks noGrp="1"/>
+          </p:cNvSpPr>
+          <p:nvPr>
+            <p:ph type="sldNum" idx="5" sz="quarter"/>
+          </p:nvPr>
+        </p:nvSpPr>
+        <p:spPr/>
+      </p:sp>
+    </p:spTree>
+  </p:cSld>
+  <p:clrMapOvr>
+    <a:masterClrMapping/>
+  </p:clrMapOvr>
+</p:notes>
+</file>
+
+<file path=ppt/notesSlides/notesSlide49.xml><?xml version="1.0" encoding="utf-8"?>
+<p:notes xmlns:a="http://schemas.openxmlformats.org/drawingml/2006/main" xmlns:p="http://schemas.openxmlformats.org/presentationml/2006/main" xmlns:r="http://schemas.openxmlformats.org/officeDocument/2006/relationships">
+  <p:cSld>
+    <p:spTree>
+      <p:nvGrpSpPr>
+        <p:cNvPr id="1" name=""/>
+        <p:cNvGrpSpPr/>
+        <p:nvPr/>
+      </p:nvGrpSpPr>
+      <p:grpSpPr>
+        <a:xfrm>
+          <a:off x="0" y="0"/>
+          <a:ext cx="0" cy="0"/>
+          <a:chOff x="0" y="0"/>
+          <a:chExt cx="0" cy="0"/>
+        </a:xfrm>
+      </p:grpSpPr>
+      <p:sp>
+        <p:nvSpPr>
+          <p:cNvPr id="2" name="Slide Image Placeholder 1"/>
+          <p:cNvSpPr>
+            <a:spLocks noGrp="1"/>
+          </p:cNvSpPr>
+          <p:nvPr>
+            <p:ph type="sldImg" idx="2"/>
+          </p:nvPr>
+        </p:nvSpPr>
+        <p:spPr/>
+      </p:sp>
+      <p:sp>
+        <p:nvSpPr>
+          <p:cNvPr id="3" name="Notes Placeholder 2"/>
+          <p:cNvSpPr>
+            <a:spLocks noGrp="1"/>
+          </p:cNvSpPr>
+          <p:nvPr>
+            <p:ph type="body" idx="3" sz="quarter"/>
+          </p:nvPr>
+        </p:nvSpPr>
+        <p:spPr/>
+        <p:txBody>
+          <a:bodyPr/>
+          <a:lstStyle/>
+          <a:p>
+            <a:r>
+              <a:t>Hands-on: module5/examples/virtual_sequences/</a:t>
+            </a:r>
+          </a:p>
+        </p:txBody>
+      </p:sp>
+      <p:sp>
+        <p:nvSpPr>
+          <p:cNvPr id="4" name="Slide Number Placeholder 3"/>
+          <p:cNvSpPr>
+            <a:spLocks noGrp="1"/>
+          </p:cNvSpPr>
+          <p:nvPr>
+            <p:ph type="sldNum" idx="5" sz="quarter"/>
+          </p:nvPr>
+        </p:nvSpPr>
+        <p:spPr/>
+      </p:sp>
+    </p:spTree>
+  </p:cSld>
+  <p:clrMapOvr>
+    <a:masterClrMapping/>
+  </p:clrMapOvr>
+</p:notes>
+</file>
+
 <file path=ppt/notesSlides/notesSlide5.xml><?xml version="1.0" encoding="utf-8"?>
 <p:notes xmlns:a="http://schemas.openxmlformats.org/drawingml/2006/main" xmlns:p="http://schemas.openxmlformats.org/presentationml/2006/main" xmlns:r="http://schemas.openxmlformats.org/officeDocument/2006/relationships">
   <p:cSld>
@@ -3501,6 +3652,636 @@
           <a:p>
             <a:r>
               <a:t>From MODULE5 Topics Covered.</a:t>
+            </a:r>
+          </a:p>
+        </p:txBody>
+      </p:sp>
+      <p:sp>
+        <p:nvSpPr>
+          <p:cNvPr id="4" name="Slide Number Placeholder 3"/>
+          <p:cNvSpPr>
+            <a:spLocks noGrp="1"/>
+          </p:cNvSpPr>
+          <p:nvPr>
+            <p:ph type="sldNum" idx="5" sz="quarter"/>
+          </p:nvPr>
+        </p:nvSpPr>
+        <p:spPr/>
+      </p:sp>
+    </p:spTree>
+  </p:cSld>
+  <p:clrMapOvr>
+    <a:masterClrMapping/>
+  </p:clrMapOvr>
+</p:notes>
+</file>
+
+<file path=ppt/notesSlides/notesSlide50.xml><?xml version="1.0" encoding="utf-8"?>
+<p:notes xmlns:a="http://schemas.openxmlformats.org/drawingml/2006/main" xmlns:p="http://schemas.openxmlformats.org/presentationml/2006/main" xmlns:r="http://schemas.openxmlformats.org/officeDocument/2006/relationships">
+  <p:cSld>
+    <p:spTree>
+      <p:nvGrpSpPr>
+        <p:cNvPr id="1" name=""/>
+        <p:cNvGrpSpPr/>
+        <p:nvPr/>
+      </p:nvGrpSpPr>
+      <p:grpSpPr>
+        <a:xfrm>
+          <a:off x="0" y="0"/>
+          <a:ext cx="0" cy="0"/>
+          <a:chOff x="0" y="0"/>
+          <a:chExt cx="0" cy="0"/>
+        </a:xfrm>
+      </p:grpSpPr>
+      <p:sp>
+        <p:nvSpPr>
+          <p:cNvPr id="2" name="Slide Image Placeholder 1"/>
+          <p:cNvSpPr>
+            <a:spLocks noGrp="1"/>
+          </p:cNvSpPr>
+          <p:nvPr>
+            <p:ph type="sldImg" idx="2"/>
+          </p:nvPr>
+        </p:nvSpPr>
+        <p:spPr/>
+      </p:sp>
+      <p:sp>
+        <p:nvSpPr>
+          <p:cNvPr id="3" name="Notes Placeholder 2"/>
+          <p:cNvSpPr>
+            <a:spLocks noGrp="1"/>
+          </p:cNvSpPr>
+          <p:nvPr>
+            <p:ph type="body" idx="3" sz="quarter"/>
+          </p:nvPr>
+        </p:nvSpPr>
+        <p:spPr/>
+        <p:txBody>
+          <a:bodyPr/>
+          <a:lstStyle/>
+          <a:p>
+            <a:r>
+              <a:t>module5/examples/coverage/README.md</a:t>
+            </a:r>
+          </a:p>
+        </p:txBody>
+      </p:sp>
+      <p:sp>
+        <p:nvSpPr>
+          <p:cNvPr id="4" name="Slide Number Placeholder 3"/>
+          <p:cNvSpPr>
+            <a:spLocks noGrp="1"/>
+          </p:cNvSpPr>
+          <p:nvPr>
+            <p:ph type="sldNum" idx="5" sz="quarter"/>
+          </p:nvPr>
+        </p:nvSpPr>
+        <p:spPr/>
+      </p:sp>
+    </p:spTree>
+  </p:cSld>
+  <p:clrMapOvr>
+    <a:masterClrMapping/>
+  </p:clrMapOvr>
+</p:notes>
+</file>
+
+<file path=ppt/notesSlides/notesSlide51.xml><?xml version="1.0" encoding="utf-8"?>
+<p:notes xmlns:a="http://schemas.openxmlformats.org/drawingml/2006/main" xmlns:p="http://schemas.openxmlformats.org/presentationml/2006/main" xmlns:r="http://schemas.openxmlformats.org/officeDocument/2006/relationships">
+  <p:cSld>
+    <p:spTree>
+      <p:nvGrpSpPr>
+        <p:cNvPr id="1" name=""/>
+        <p:cNvGrpSpPr/>
+        <p:nvPr/>
+      </p:nvGrpSpPr>
+      <p:grpSpPr>
+        <a:xfrm>
+          <a:off x="0" y="0"/>
+          <a:ext cx="0" cy="0"/>
+          <a:chOff x="0" y="0"/>
+          <a:chExt cx="0" cy="0"/>
+        </a:xfrm>
+      </p:grpSpPr>
+      <p:sp>
+        <p:nvSpPr>
+          <p:cNvPr id="2" name="Slide Image Placeholder 1"/>
+          <p:cNvSpPr>
+            <a:spLocks noGrp="1"/>
+          </p:cNvSpPr>
+          <p:nvPr>
+            <p:ph type="sldImg" idx="2"/>
+          </p:nvPr>
+        </p:nvSpPr>
+        <p:spPr/>
+      </p:sp>
+      <p:sp>
+        <p:nvSpPr>
+          <p:cNvPr id="3" name="Notes Placeholder 2"/>
+          <p:cNvSpPr>
+            <a:spLocks noGrp="1"/>
+          </p:cNvSpPr>
+          <p:nvPr>
+            <p:ph type="body" idx="3" sz="quarter"/>
+          </p:nvPr>
+        </p:nvSpPr>
+        <p:spPr/>
+        <p:txBody>
+          <a:bodyPr/>
+          <a:lstStyle/>
+          <a:p>
+            <a:r>
+              <a:t>Hands-on: module5/examples/coverage/</a:t>
+            </a:r>
+          </a:p>
+        </p:txBody>
+      </p:sp>
+      <p:sp>
+        <p:nvSpPr>
+          <p:cNvPr id="4" name="Slide Number Placeholder 3"/>
+          <p:cNvSpPr>
+            <a:spLocks noGrp="1"/>
+          </p:cNvSpPr>
+          <p:nvPr>
+            <p:ph type="sldNum" idx="5" sz="quarter"/>
+          </p:nvPr>
+        </p:nvSpPr>
+        <p:spPr/>
+      </p:sp>
+    </p:spTree>
+  </p:cSld>
+  <p:clrMapOvr>
+    <a:masterClrMapping/>
+  </p:clrMapOvr>
+</p:notes>
+</file>
+
+<file path=ppt/notesSlides/notesSlide52.xml><?xml version="1.0" encoding="utf-8"?>
+<p:notes xmlns:a="http://schemas.openxmlformats.org/drawingml/2006/main" xmlns:p="http://schemas.openxmlformats.org/presentationml/2006/main" xmlns:r="http://schemas.openxmlformats.org/officeDocument/2006/relationships">
+  <p:cSld>
+    <p:spTree>
+      <p:nvGrpSpPr>
+        <p:cNvPr id="1" name=""/>
+        <p:cNvGrpSpPr/>
+        <p:nvPr/>
+      </p:nvGrpSpPr>
+      <p:grpSpPr>
+        <a:xfrm>
+          <a:off x="0" y="0"/>
+          <a:ext cx="0" cy="0"/>
+          <a:chOff x="0" y="0"/>
+          <a:chExt cx="0" cy="0"/>
+        </a:xfrm>
+      </p:grpSpPr>
+      <p:sp>
+        <p:nvSpPr>
+          <p:cNvPr id="2" name="Slide Image Placeholder 1"/>
+          <p:cNvSpPr>
+            <a:spLocks noGrp="1"/>
+          </p:cNvSpPr>
+          <p:nvPr>
+            <p:ph type="sldImg" idx="2"/>
+          </p:nvPr>
+        </p:nvSpPr>
+        <p:spPr/>
+      </p:sp>
+      <p:sp>
+        <p:nvSpPr>
+          <p:cNvPr id="3" name="Notes Placeholder 2"/>
+          <p:cNvSpPr>
+            <a:spLocks noGrp="1"/>
+          </p:cNvSpPr>
+          <p:nvPr>
+            <p:ph type="body" idx="3" sz="quarter"/>
+          </p:nvPr>
+        </p:nvSpPr>
+        <p:spPr/>
+        <p:txBody>
+          <a:bodyPr/>
+          <a:lstStyle/>
+          <a:p>
+            <a:r>
+              <a:t>module5/examples/configuration/README.md</a:t>
+            </a:r>
+          </a:p>
+        </p:txBody>
+      </p:sp>
+      <p:sp>
+        <p:nvSpPr>
+          <p:cNvPr id="4" name="Slide Number Placeholder 3"/>
+          <p:cNvSpPr>
+            <a:spLocks noGrp="1"/>
+          </p:cNvSpPr>
+          <p:nvPr>
+            <p:ph type="sldNum" idx="5" sz="quarter"/>
+          </p:nvPr>
+        </p:nvSpPr>
+        <p:spPr/>
+      </p:sp>
+    </p:spTree>
+  </p:cSld>
+  <p:clrMapOvr>
+    <a:masterClrMapping/>
+  </p:clrMapOvr>
+</p:notes>
+</file>
+
+<file path=ppt/notesSlides/notesSlide53.xml><?xml version="1.0" encoding="utf-8"?>
+<p:notes xmlns:a="http://schemas.openxmlformats.org/drawingml/2006/main" xmlns:p="http://schemas.openxmlformats.org/presentationml/2006/main" xmlns:r="http://schemas.openxmlformats.org/officeDocument/2006/relationships">
+  <p:cSld>
+    <p:spTree>
+      <p:nvGrpSpPr>
+        <p:cNvPr id="1" name=""/>
+        <p:cNvGrpSpPr/>
+        <p:nvPr/>
+      </p:nvGrpSpPr>
+      <p:grpSpPr>
+        <a:xfrm>
+          <a:off x="0" y="0"/>
+          <a:ext cx="0" cy="0"/>
+          <a:chOff x="0" y="0"/>
+          <a:chExt cx="0" cy="0"/>
+        </a:xfrm>
+      </p:grpSpPr>
+      <p:sp>
+        <p:nvSpPr>
+          <p:cNvPr id="2" name="Slide Image Placeholder 1"/>
+          <p:cNvSpPr>
+            <a:spLocks noGrp="1"/>
+          </p:cNvSpPr>
+          <p:nvPr>
+            <p:ph type="sldImg" idx="2"/>
+          </p:nvPr>
+        </p:nvSpPr>
+        <p:spPr/>
+      </p:sp>
+      <p:sp>
+        <p:nvSpPr>
+          <p:cNvPr id="3" name="Notes Placeholder 2"/>
+          <p:cNvSpPr>
+            <a:spLocks noGrp="1"/>
+          </p:cNvSpPr>
+          <p:nvPr>
+            <p:ph type="body" idx="3" sz="quarter"/>
+          </p:nvPr>
+        </p:nvSpPr>
+        <p:spPr/>
+        <p:txBody>
+          <a:bodyPr/>
+          <a:lstStyle/>
+          <a:p>
+            <a:r>
+              <a:t>Hands-on: module5/examples/configuration/</a:t>
+            </a:r>
+          </a:p>
+        </p:txBody>
+      </p:sp>
+      <p:sp>
+        <p:nvSpPr>
+          <p:cNvPr id="4" name="Slide Number Placeholder 3"/>
+          <p:cNvSpPr>
+            <a:spLocks noGrp="1"/>
+          </p:cNvSpPr>
+          <p:nvPr>
+            <p:ph type="sldNum" idx="5" sz="quarter"/>
+          </p:nvPr>
+        </p:nvSpPr>
+        <p:spPr/>
+      </p:sp>
+    </p:spTree>
+  </p:cSld>
+  <p:clrMapOvr>
+    <a:masterClrMapping/>
+  </p:clrMapOvr>
+</p:notes>
+</file>
+
+<file path=ppt/notesSlides/notesSlide54.xml><?xml version="1.0" encoding="utf-8"?>
+<p:notes xmlns:a="http://schemas.openxmlformats.org/drawingml/2006/main" xmlns:p="http://schemas.openxmlformats.org/presentationml/2006/main" xmlns:r="http://schemas.openxmlformats.org/officeDocument/2006/relationships">
+  <p:cSld>
+    <p:spTree>
+      <p:nvGrpSpPr>
+        <p:cNvPr id="1" name=""/>
+        <p:cNvGrpSpPr/>
+        <p:nvPr/>
+      </p:nvGrpSpPr>
+      <p:grpSpPr>
+        <a:xfrm>
+          <a:off x="0" y="0"/>
+          <a:ext cx="0" cy="0"/>
+          <a:chOff x="0" y="0"/>
+          <a:chExt cx="0" cy="0"/>
+        </a:xfrm>
+      </p:grpSpPr>
+      <p:sp>
+        <p:nvSpPr>
+          <p:cNvPr id="2" name="Slide Image Placeholder 1"/>
+          <p:cNvSpPr>
+            <a:spLocks noGrp="1"/>
+          </p:cNvSpPr>
+          <p:nvPr>
+            <p:ph type="sldImg" idx="2"/>
+          </p:nvPr>
+        </p:nvSpPr>
+        <p:spPr/>
+      </p:sp>
+      <p:sp>
+        <p:nvSpPr>
+          <p:cNvPr id="3" name="Notes Placeholder 2"/>
+          <p:cNvSpPr>
+            <a:spLocks noGrp="1"/>
+          </p:cNvSpPr>
+          <p:nvPr>
+            <p:ph type="body" idx="3" sz="quarter"/>
+          </p:nvPr>
+        </p:nvSpPr>
+        <p:spPr/>
+        <p:txBody>
+          <a:bodyPr/>
+          <a:lstStyle/>
+          <a:p>
+            <a:r>
+              <a:t>module5/examples/callbacks/README.md</a:t>
+            </a:r>
+          </a:p>
+        </p:txBody>
+      </p:sp>
+      <p:sp>
+        <p:nvSpPr>
+          <p:cNvPr id="4" name="Slide Number Placeholder 3"/>
+          <p:cNvSpPr>
+            <a:spLocks noGrp="1"/>
+          </p:cNvSpPr>
+          <p:nvPr>
+            <p:ph type="sldNum" idx="5" sz="quarter"/>
+          </p:nvPr>
+        </p:nvSpPr>
+        <p:spPr/>
+      </p:sp>
+    </p:spTree>
+  </p:cSld>
+  <p:clrMapOvr>
+    <a:masterClrMapping/>
+  </p:clrMapOvr>
+</p:notes>
+</file>
+
+<file path=ppt/notesSlides/notesSlide55.xml><?xml version="1.0" encoding="utf-8"?>
+<p:notes xmlns:a="http://schemas.openxmlformats.org/drawingml/2006/main" xmlns:p="http://schemas.openxmlformats.org/presentationml/2006/main" xmlns:r="http://schemas.openxmlformats.org/officeDocument/2006/relationships">
+  <p:cSld>
+    <p:spTree>
+      <p:nvGrpSpPr>
+        <p:cNvPr id="1" name=""/>
+        <p:cNvGrpSpPr/>
+        <p:nvPr/>
+      </p:nvGrpSpPr>
+      <p:grpSpPr>
+        <a:xfrm>
+          <a:off x="0" y="0"/>
+          <a:ext cx="0" cy="0"/>
+          <a:chOff x="0" y="0"/>
+          <a:chExt cx="0" cy="0"/>
+        </a:xfrm>
+      </p:grpSpPr>
+      <p:sp>
+        <p:nvSpPr>
+          <p:cNvPr id="2" name="Slide Image Placeholder 1"/>
+          <p:cNvSpPr>
+            <a:spLocks noGrp="1"/>
+          </p:cNvSpPr>
+          <p:nvPr>
+            <p:ph type="sldImg" idx="2"/>
+          </p:nvPr>
+        </p:nvSpPr>
+        <p:spPr/>
+      </p:sp>
+      <p:sp>
+        <p:nvSpPr>
+          <p:cNvPr id="3" name="Notes Placeholder 2"/>
+          <p:cNvSpPr>
+            <a:spLocks noGrp="1"/>
+          </p:cNvSpPr>
+          <p:nvPr>
+            <p:ph type="body" idx="3" sz="quarter"/>
+          </p:nvPr>
+        </p:nvSpPr>
+        <p:spPr/>
+        <p:txBody>
+          <a:bodyPr/>
+          <a:lstStyle/>
+          <a:p>
+            <a:r>
+              <a:t>Hands-on: module5/examples/callbacks/</a:t>
+            </a:r>
+          </a:p>
+        </p:txBody>
+      </p:sp>
+      <p:sp>
+        <p:nvSpPr>
+          <p:cNvPr id="4" name="Slide Number Placeholder 3"/>
+          <p:cNvSpPr>
+            <a:spLocks noGrp="1"/>
+          </p:cNvSpPr>
+          <p:nvPr>
+            <p:ph type="sldNum" idx="5" sz="quarter"/>
+          </p:nvPr>
+        </p:nvSpPr>
+        <p:spPr/>
+      </p:sp>
+    </p:spTree>
+  </p:cSld>
+  <p:clrMapOvr>
+    <a:masterClrMapping/>
+  </p:clrMapOvr>
+</p:notes>
+</file>
+
+<file path=ppt/notesSlides/notesSlide56.xml><?xml version="1.0" encoding="utf-8"?>
+<p:notes xmlns:a="http://schemas.openxmlformats.org/drawingml/2006/main" xmlns:p="http://schemas.openxmlformats.org/presentationml/2006/main" xmlns:r="http://schemas.openxmlformats.org/officeDocument/2006/relationships">
+  <p:cSld>
+    <p:spTree>
+      <p:nvGrpSpPr>
+        <p:cNvPr id="1" name=""/>
+        <p:cNvGrpSpPr/>
+        <p:nvPr/>
+      </p:nvGrpSpPr>
+      <p:grpSpPr>
+        <a:xfrm>
+          <a:off x="0" y="0"/>
+          <a:ext cx="0" cy="0"/>
+          <a:chOff x="0" y="0"/>
+          <a:chExt cx="0" cy="0"/>
+        </a:xfrm>
+      </p:grpSpPr>
+      <p:sp>
+        <p:nvSpPr>
+          <p:cNvPr id="2" name="Slide Image Placeholder 1"/>
+          <p:cNvSpPr>
+            <a:spLocks noGrp="1"/>
+          </p:cNvSpPr>
+          <p:nvPr>
+            <p:ph type="sldImg" idx="2"/>
+          </p:nvPr>
+        </p:nvSpPr>
+        <p:spPr/>
+      </p:sp>
+      <p:sp>
+        <p:nvSpPr>
+          <p:cNvPr id="3" name="Notes Placeholder 2"/>
+          <p:cNvSpPr>
+            <a:spLocks noGrp="1"/>
+          </p:cNvSpPr>
+          <p:nvPr>
+            <p:ph type="body" idx="3" sz="quarter"/>
+          </p:nvPr>
+        </p:nvSpPr>
+        <p:spPr/>
+        <p:txBody>
+          <a:bodyPr/>
+          <a:lstStyle/>
+          <a:p>
+            <a:r>
+              <a:t>module5/examples/register_model/README.md</a:t>
+            </a:r>
+          </a:p>
+        </p:txBody>
+      </p:sp>
+      <p:sp>
+        <p:nvSpPr>
+          <p:cNvPr id="4" name="Slide Number Placeholder 3"/>
+          <p:cNvSpPr>
+            <a:spLocks noGrp="1"/>
+          </p:cNvSpPr>
+          <p:nvPr>
+            <p:ph type="sldNum" idx="5" sz="quarter"/>
+          </p:nvPr>
+        </p:nvSpPr>
+        <p:spPr/>
+      </p:sp>
+    </p:spTree>
+  </p:cSld>
+  <p:clrMapOvr>
+    <a:masterClrMapping/>
+  </p:clrMapOvr>
+</p:notes>
+</file>
+
+<file path=ppt/notesSlides/notesSlide57.xml><?xml version="1.0" encoding="utf-8"?>
+<p:notes xmlns:a="http://schemas.openxmlformats.org/drawingml/2006/main" xmlns:p="http://schemas.openxmlformats.org/presentationml/2006/main" xmlns:r="http://schemas.openxmlformats.org/officeDocument/2006/relationships">
+  <p:cSld>
+    <p:spTree>
+      <p:nvGrpSpPr>
+        <p:cNvPr id="1" name=""/>
+        <p:cNvGrpSpPr/>
+        <p:nvPr/>
+      </p:nvGrpSpPr>
+      <p:grpSpPr>
+        <a:xfrm>
+          <a:off x="0" y="0"/>
+          <a:ext cx="0" cy="0"/>
+          <a:chOff x="0" y="0"/>
+          <a:chExt cx="0" cy="0"/>
+        </a:xfrm>
+      </p:grpSpPr>
+      <p:sp>
+        <p:nvSpPr>
+          <p:cNvPr id="2" name="Slide Image Placeholder 1"/>
+          <p:cNvSpPr>
+            <a:spLocks noGrp="1"/>
+          </p:cNvSpPr>
+          <p:nvPr>
+            <p:ph type="sldImg" idx="2"/>
+          </p:nvPr>
+        </p:nvSpPr>
+        <p:spPr/>
+      </p:sp>
+      <p:sp>
+        <p:nvSpPr>
+          <p:cNvPr id="3" name="Notes Placeholder 2"/>
+          <p:cNvSpPr>
+            <a:spLocks noGrp="1"/>
+          </p:cNvSpPr>
+          <p:nvPr>
+            <p:ph type="body" idx="3" sz="quarter"/>
+          </p:nvPr>
+        </p:nvSpPr>
+        <p:spPr/>
+        <p:txBody>
+          <a:bodyPr/>
+          <a:lstStyle/>
+          <a:p>
+            <a:r>
+              <a:t>Hands-on: module5/examples/register_model/</a:t>
+            </a:r>
+          </a:p>
+        </p:txBody>
+      </p:sp>
+      <p:sp>
+        <p:nvSpPr>
+          <p:cNvPr id="4" name="Slide Number Placeholder 3"/>
+          <p:cNvSpPr>
+            <a:spLocks noGrp="1"/>
+          </p:cNvSpPr>
+          <p:nvPr>
+            <p:ph type="sldNum" idx="5" sz="quarter"/>
+          </p:nvPr>
+        </p:nvSpPr>
+        <p:spPr/>
+      </p:sp>
+    </p:spTree>
+  </p:cSld>
+  <p:clrMapOvr>
+    <a:masterClrMapping/>
+  </p:clrMapOvr>
+</p:notes>
+</file>
+
+<file path=ppt/notesSlides/notesSlide58.xml><?xml version="1.0" encoding="utf-8"?>
+<p:notes xmlns:a="http://schemas.openxmlformats.org/drawingml/2006/main" xmlns:p="http://schemas.openxmlformats.org/presentationml/2006/main" xmlns:r="http://schemas.openxmlformats.org/officeDocument/2006/relationships">
+  <p:cSld>
+    <p:spTree>
+      <p:nvGrpSpPr>
+        <p:cNvPr id="1" name=""/>
+        <p:cNvGrpSpPr/>
+        <p:nvPr/>
+      </p:nvGrpSpPr>
+      <p:grpSpPr>
+        <a:xfrm>
+          <a:off x="0" y="0"/>
+          <a:ext cx="0" cy="0"/>
+          <a:chOff x="0" y="0"/>
+          <a:chExt cx="0" cy="0"/>
+        </a:xfrm>
+      </p:grpSpPr>
+      <p:sp>
+        <p:nvSpPr>
+          <p:cNvPr id="2" name="Slide Image Placeholder 1"/>
+          <p:cNvSpPr>
+            <a:spLocks noGrp="1"/>
+          </p:cNvSpPr>
+          <p:nvPr>
+            <p:ph type="sldImg" idx="2"/>
+          </p:nvPr>
+        </p:nvSpPr>
+        <p:spPr/>
+      </p:sp>
+      <p:sp>
+        <p:nvSpPr>
+          <p:cNvPr id="3" name="Notes Placeholder 2"/>
+          <p:cNvSpPr>
+            <a:spLocks noGrp="1"/>
+          </p:cNvSpPr>
+          <p:nvPr>
+            <p:ph type="body" idx="3" sz="quarter"/>
+          </p:nvPr>
+        </p:nvSpPr>
+        <p:spPr/>
+        <p:txBody>
+          <a:bodyPr/>
+          <a:lstStyle/>
+          <a:p>
+            <a:r>
+              <a:t>From MODULE5 Learning Outcomes.</a:t>
             </a:r>
           </a:p>
         </p:txBody>
@@ -18772,7 +19553,7 @@
               </a:defRPr>
             </a:pPr>
             <a:r>
-              <a:t>$ ./scripts/module5.sh --check</a:t>
+              <a:t>$ ./scripts/module5.sh --virtual-sequences</a:t>
             </a:r>
           </a:p>
         </p:txBody>
@@ -19006,8 +19787,8 @@
         </p:nvSpPr>
         <p:spPr>
           <a:xfrm>
-            <a:off x="548640" y="2743200"/>
-            <a:ext cx="11064240" cy="1371600"/>
+            <a:off x="548640" y="411480"/>
+            <a:ext cx="11064240" cy="777240"/>
           </a:xfrm>
           <a:prstGeom prst="rect">
             <a:avLst/>
@@ -19020,11 +19801,11 @@
           </a:bodyPr>
           <a:lstStyle/>
           <a:p>
-            <a:pPr algn="ctr">
-              <a:lnSpc>
-                <a:spcPts val="2200"/>
-              </a:lnSpc>
-              <a:defRPr sz="3600" b="1">
+            <a:pPr>
+              <a:lnSpc>
+                <a:spcPts val="2200"/>
+              </a:lnSpc>
+              <a:defRPr sz="2800" b="1">
                 <a:solidFill>
                   <a:srgbClr val="1A1A2E"/>
                 </a:solidFill>
@@ -19032,7 +19813,7 @@
               </a:defRPr>
             </a:pPr>
             <a:r>
-              <a:t>Practice &amp; assessment</a:t>
+              <a:t>Example 1: Virtual Sequences</a:t>
             </a:r>
           </a:p>
         </p:txBody>
@@ -19040,6 +19821,143 @@
       <p:sp>
         <p:nvSpPr>
           <p:cNvPr id="3" name="TextBox 2"/>
+          <p:cNvSpPr txBox="1"/>
+          <p:nvPr/>
+        </p:nvSpPr>
+        <p:spPr>
+          <a:xfrm>
+            <a:off x="548640" y="1234440"/>
+            <a:ext cx="11064240" cy="4937760"/>
+          </a:xfrm>
+          <a:prstGeom prst="rect">
+            <a:avLst/>
+          </a:prstGeom>
+          <a:noFill/>
+        </p:spPr>
+        <p:txBody>
+          <a:bodyPr wrap="square">
+            <a:noAutofit/>
+          </a:bodyPr>
+          <a:lstStyle/>
+          <a:p>
+            <a:pPr>
+              <a:lnSpc>
+                <a:spcPts val="2200"/>
+              </a:lnSpc>
+              <a:spcAft>
+                <a:spcPts val="1000"/>
+              </a:spcAft>
+              <a:defRPr sz="2000" b="0">
+                <a:solidFill>
+                  <a:srgbClr val="333333"/>
+                </a:solidFill>
+                <a:latin typeface="Calibri"/>
+              </a:defRPr>
+            </a:pPr>
+            <a:r>
+              <a:t>• VirtualSequencer: Contains references to multiple</a:t>
+            </a:r>
+          </a:p>
+          <a:p>
+            <a:pPr>
+              <a:lnSpc>
+                <a:spcPts val="2200"/>
+              </a:lnSpc>
+              <a:spcAft>
+                <a:spcPts val="1000"/>
+              </a:spcAft>
+              <a:defRPr sz="2000" b="0">
+                <a:solidFill>
+                  <a:srgbClr val="333333"/>
+                </a:solidFill>
+                <a:latin typeface="Calibri"/>
+              </a:defRPr>
+            </a:pPr>
+            <a:r>
+              <a:t>      sequencers (`master_seqr`, `slave_seqr`)</a:t>
+            </a:r>
+          </a:p>
+          <a:p>
+            <a:pPr>
+              <a:lnSpc>
+                <a:spcPts val="2200"/>
+              </a:lnSpc>
+              <a:spcAft>
+                <a:spcPts val="1000"/>
+              </a:spcAft>
+              <a:defRPr sz="2000" b="0">
+                <a:solidFill>
+                  <a:srgbClr val="333333"/>
+                </a:solidFill>
+                <a:latin typeface="Calibri"/>
+              </a:defRPr>
+            </a:pPr>
+            <a:r>
+              <a:t>• VirtualSequence: Coordinates sequences on multiple</a:t>
+            </a:r>
+          </a:p>
+          <a:p>
+            <a:pPr>
+              <a:lnSpc>
+                <a:spcPts val="2200"/>
+              </a:lnSpc>
+              <a:spcAft>
+                <a:spcPts val="1000"/>
+              </a:spcAft>
+              <a:defRPr sz="2000" b="0">
+                <a:solidFill>
+                  <a:srgbClr val="333333"/>
+                </a:solidFill>
+                <a:latin typeface="Calibri"/>
+              </a:defRPr>
+            </a:pPr>
+            <a:r>
+              <a:t>      sequencers</a:t>
+            </a:r>
+          </a:p>
+          <a:p>
+            <a:pPr>
+              <a:lnSpc>
+                <a:spcPts val="2200"/>
+              </a:lnSpc>
+              <a:spcAft>
+                <a:spcPts val="1000"/>
+              </a:spcAft>
+              <a:defRPr sz="2000" b="0">
+                <a:solidFill>
+                  <a:srgbClr val="333333"/>
+                </a:solidFill>
+                <a:latin typeface="Calibri"/>
+              </a:defRPr>
+            </a:pPr>
+            <a:r>
+              <a:t>• ChannelSequence: Regular sequence for a single</a:t>
+            </a:r>
+          </a:p>
+          <a:p>
+            <a:pPr>
+              <a:lnSpc>
+                <a:spcPts val="2200"/>
+              </a:lnSpc>
+              <a:spcAft>
+                <a:spcPts val="1000"/>
+              </a:spcAft>
+              <a:defRPr sz="2000" b="0">
+                <a:solidFill>
+                  <a:srgbClr val="333333"/>
+                </a:solidFill>
+                <a:latin typeface="Calibri"/>
+              </a:defRPr>
+            </a:pPr>
+            <a:r>
+              <a:t>      channel</a:t>
+            </a:r>
+          </a:p>
+        </p:txBody>
+      </p:sp>
+      <p:sp>
+        <p:nvSpPr>
+          <p:cNvPr id="4" name="TextBox 3"/>
           <p:cNvSpPr txBox="1"/>
           <p:nvPr/>
         </p:nvSpPr>
@@ -19128,7 +20046,7 @@
               </a:defRPr>
             </a:pPr>
             <a:r>
-              <a:t>Exercises</a:t>
+              <a:t>Demo: Virtual Sequences</a:t>
             </a:r>
           </a:p>
         </p:txBody>
@@ -19141,13 +20059,15 @@
         </p:nvSpPr>
         <p:spPr>
           <a:xfrm>
-            <a:off x="548640" y="1234440"/>
-            <a:ext cx="11064240" cy="4937760"/>
+            <a:off x="548640" y="1051560"/>
+            <a:ext cx="11064240" cy="914400"/>
           </a:xfrm>
           <a:prstGeom prst="rect">
             <a:avLst/>
           </a:prstGeom>
-          <a:noFill/>
+          <a:solidFill>
+            <a:srgbClr val="F4F4F4"/>
+          </a:solidFill>
         </p:spPr>
         <p:txBody>
           <a:bodyPr wrap="square">
@@ -19160,100 +20080,48 @@
                 <a:spcPts val="2200"/>
               </a:lnSpc>
               <a:spcAft>
-                <a:spcPts val="1000"/>
-              </a:spcAft>
-              <a:defRPr sz="2000" b="0">
-                <a:solidFill>
-                  <a:srgbClr val="333333"/>
-                </a:solidFill>
-                <a:latin typeface="Calibri"/>
-              </a:defRPr>
-            </a:pPr>
-            <a:r>
-              <a:t>• Virtual Sequences</a:t>
-            </a:r>
-          </a:p>
-          <a:p>
-            <a:pPr>
-              <a:lnSpc>
-                <a:spcPts val="2200"/>
-              </a:lnSpc>
-              <a:spcAft>
-                <a:spcPts val="1000"/>
-              </a:spcAft>
-              <a:defRPr sz="2000" b="0">
-                <a:solidFill>
-                  <a:srgbClr val="333333"/>
-                </a:solidFill>
-                <a:latin typeface="Calibri"/>
-              </a:defRPr>
-            </a:pPr>
-            <a:r>
-              <a:t>• Coverage Models</a:t>
-            </a:r>
-          </a:p>
-          <a:p>
-            <a:pPr>
-              <a:lnSpc>
-                <a:spcPts val="2200"/>
-              </a:lnSpc>
-              <a:spcAft>
-                <a:spcPts val="1000"/>
-              </a:spcAft>
-              <a:defRPr sz="2000" b="0">
-                <a:solidFill>
-                  <a:srgbClr val="333333"/>
-                </a:solidFill>
-                <a:latin typeface="Calibri"/>
-              </a:defRPr>
-            </a:pPr>
-            <a:r>
-              <a:t>• Advanced Configuration</a:t>
-            </a:r>
-          </a:p>
-          <a:p>
-            <a:pPr>
-              <a:lnSpc>
-                <a:spcPts val="2200"/>
-              </a:lnSpc>
-              <a:spcAft>
-                <a:spcPts val="1000"/>
-              </a:spcAft>
-              <a:defRPr sz="2000" b="0">
-                <a:solidFill>
-                  <a:srgbClr val="333333"/>
-                </a:solidFill>
-                <a:latin typeface="Calibri"/>
-              </a:defRPr>
-            </a:pPr>
-            <a:r>
-              <a:t>• Callbacks</a:t>
-            </a:r>
-          </a:p>
-          <a:p>
-            <a:pPr>
-              <a:lnSpc>
-                <a:spcPts val="2200"/>
-              </a:lnSpc>
-              <a:spcAft>
-                <a:spcPts val="1000"/>
-              </a:spcAft>
-              <a:defRPr sz="2000" b="0">
-                <a:solidFill>
-                  <a:srgbClr val="333333"/>
-                </a:solidFill>
-                <a:latin typeface="Calibri"/>
-              </a:defRPr>
-            </a:pPr>
-            <a:r>
-              <a:t>• Register Model</a:t>
-            </a:r>
-          </a:p>
-        </p:txBody>
-      </p:sp>
-      <p:sp>
-        <p:nvSpPr>
-          <p:cNvPr id="4" name="TextBox 3"/>
+                <a:spcPts val="200"/>
+              </a:spcAft>
+              <a:defRPr sz="2000" b="0">
+                <a:solidFill>
+                  <a:srgbClr val="333333"/>
+                </a:solidFill>
+                <a:latin typeface="Consolas"/>
+              </a:defRPr>
+            </a:pPr>
+            <a:r>
+              <a:t>$ ./scripts/module5.sh --virtual-sequences</a:t>
+            </a:r>
+          </a:p>
+        </p:txBody>
+      </p:sp>
+      <p:pic>
+        <p:nvPicPr>
+          <p:cNvPr id="4" name="Picture 3" descr="ex01_virtual_sequences.png"/>
+          <p:cNvPicPr>
+            <a:picLocks noChangeAspect="1"/>
+          </p:cNvPicPr>
+          <p:nvPr/>
+        </p:nvPicPr>
+        <p:blipFill>
+          <a:blip r:embed="rId2"/>
+          <a:stretch>
+            <a:fillRect/>
+          </a:stretch>
+        </p:blipFill>
+        <p:spPr>
+          <a:xfrm>
+            <a:off x="548640" y="1965960"/>
+            <a:ext cx="7071358" cy="3977639"/>
+          </a:xfrm>
+          <a:prstGeom prst="rect">
+            <a:avLst/>
+          </a:prstGeom>
+        </p:spPr>
+      </p:pic>
+      <p:sp>
+        <p:nvSpPr>
+          <p:cNvPr id="5" name="TextBox 4"/>
           <p:cNvSpPr txBox="1"/>
           <p:nvPr/>
         </p:nvSpPr>
@@ -19342,7 +20210,7 @@
               </a:defRPr>
             </a:pPr>
             <a:r>
-              <a:t>Assessment checklist</a:t>
+              <a:t>Example 2: Coverage</a:t>
             </a:r>
           </a:p>
         </p:txBody>
@@ -19384,102 +20252,102 @@
               </a:defRPr>
             </a:pPr>
             <a:r>
-              <a:t>• Can implement virtual sequences</a:t>
-            </a:r>
-          </a:p>
-          <a:p>
-            <a:pPr>
-              <a:lnSpc>
-                <a:spcPts val="2200"/>
-              </a:lnSpc>
-              <a:spcAft>
-                <a:spcPts val="1000"/>
-              </a:spcAft>
-              <a:defRPr sz="2000" b="0">
-                <a:solidFill>
-                  <a:srgbClr val="333333"/>
-                </a:solidFill>
-                <a:latin typeface="Calibri"/>
-              </a:defRPr>
-            </a:pPr>
-            <a:r>
-              <a:t>• Can create coverage models</a:t>
-            </a:r>
-          </a:p>
-          <a:p>
-            <a:pPr>
-              <a:lnSpc>
-                <a:spcPts val="2200"/>
-              </a:lnSpc>
-              <a:spcAft>
-                <a:spcPts val="1000"/>
-              </a:spcAft>
-              <a:defRPr sz="2000" b="0">
-                <a:solidFill>
-                  <a:srgbClr val="333333"/>
-                </a:solidFill>
-                <a:latin typeface="Calibri"/>
-              </a:defRPr>
-            </a:pPr>
-            <a:r>
-              <a:t>• Can use advanced configuration</a:t>
-            </a:r>
-          </a:p>
-          <a:p>
-            <a:pPr>
-              <a:lnSpc>
-                <a:spcPts val="2200"/>
-              </a:lnSpc>
-              <a:spcAft>
-                <a:spcPts val="1000"/>
-              </a:spcAft>
-              <a:defRPr sz="2000" b="0">
-                <a:solidFill>
-                  <a:srgbClr val="333333"/>
-                </a:solidFill>
-                <a:latin typeface="Calibri"/>
-              </a:defRPr>
-            </a:pPr>
-            <a:r>
-              <a:t>• Can implement callbacks</a:t>
-            </a:r>
-          </a:p>
-          <a:p>
-            <a:pPr>
-              <a:lnSpc>
-                <a:spcPts val="2200"/>
-              </a:lnSpc>
-              <a:spcAft>
-                <a:spcPts val="1000"/>
-              </a:spcAft>
-              <a:defRPr sz="2000" b="0">
-                <a:solidFill>
-                  <a:srgbClr val="333333"/>
-                </a:solidFill>
-                <a:latin typeface="Calibri"/>
-              </a:defRPr>
-            </a:pPr>
-            <a:r>
-              <a:t>• Can use register models</a:t>
-            </a:r>
-          </a:p>
-          <a:p>
-            <a:pPr>
-              <a:lnSpc>
-                <a:spcPts val="2200"/>
-              </a:lnSpc>
-              <a:spcAft>
-                <a:spcPts val="1000"/>
-              </a:spcAft>
-              <a:defRPr sz="2000" b="0">
-                <a:solidFill>
-                  <a:srgbClr val="333333"/>
-                </a:solidFill>
-                <a:latin typeface="Calibri"/>
-              </a:defRPr>
-            </a:pPr>
-            <a:r>
-              <a:t>• Understands advanced UVM patterns</a:t>
+              <a:t>• CoverageModel: Extends `uvm_subscriber` for coverage</a:t>
+            </a:r>
+          </a:p>
+          <a:p>
+            <a:pPr>
+              <a:lnSpc>
+                <a:spcPts val="2200"/>
+              </a:lnSpc>
+              <a:spcAft>
+                <a:spcPts val="1000"/>
+              </a:spcAft>
+              <a:defRPr sz="2000" b="0">
+                <a:solidFill>
+                  <a:srgbClr val="333333"/>
+                </a:solidFill>
+                <a:latin typeface="Calibri"/>
+              </a:defRPr>
+            </a:pPr>
+            <a:r>
+              <a:t>      collection</a:t>
+            </a:r>
+          </a:p>
+          <a:p>
+            <a:pPr>
+              <a:lnSpc>
+                <a:spcPts val="2200"/>
+              </a:lnSpc>
+              <a:spcAft>
+                <a:spcPts val="1000"/>
+              </a:spcAft>
+              <a:defRPr sz="2000" b="0">
+                <a:solidFill>
+                  <a:srgbClr val="333333"/>
+                </a:solidFill>
+                <a:latin typeface="Calibri"/>
+              </a:defRPr>
+            </a:pPr>
+            <a:r>
+              <a:t>• Coverage Sampling: Via `write()` method from</a:t>
+            </a:r>
+          </a:p>
+          <a:p>
+            <a:pPr>
+              <a:lnSpc>
+                <a:spcPts val="2200"/>
+              </a:lnSpc>
+              <a:spcAft>
+                <a:spcPts val="1000"/>
+              </a:spcAft>
+              <a:defRPr sz="2000" b="0">
+                <a:solidFill>
+                  <a:srgbClr val="333333"/>
+                </a:solidFill>
+                <a:latin typeface="Calibri"/>
+              </a:defRPr>
+            </a:pPr>
+            <a:r>
+              <a:t>      analysis port</a:t>
+            </a:r>
+          </a:p>
+          <a:p>
+            <a:pPr>
+              <a:lnSpc>
+                <a:spcPts val="2200"/>
+              </a:lnSpc>
+              <a:spcAft>
+                <a:spcPts val="1000"/>
+              </a:spcAft>
+              <a:defRPr sz="2000" b="0">
+                <a:solidFill>
+                  <a:srgbClr val="333333"/>
+                </a:solidFill>
+                <a:latin typeface="Calibri"/>
+              </a:defRPr>
+            </a:pPr>
+            <a:r>
+              <a:t>• Coverage Types: Data, address range, command, and</a:t>
+            </a:r>
+          </a:p>
+          <a:p>
+            <a:pPr>
+              <a:lnSpc>
+                <a:spcPts val="2200"/>
+              </a:lnSpc>
+              <a:spcAft>
+                <a:spcPts val="1000"/>
+              </a:spcAft>
+              <a:defRPr sz="2000" b="0">
+                <a:solidFill>
+                  <a:srgbClr val="333333"/>
+                </a:solidFill>
+                <a:latin typeface="Calibri"/>
+              </a:defRPr>
+            </a:pPr>
+            <a:r>
+              <a:t>      cross coverage</a:t>
             </a:r>
           </a:p>
         </p:txBody>
@@ -19575,7 +20443,7 @@
               </a:defRPr>
             </a:pPr>
             <a:r>
-              <a:t>Summary &amp; next steps</a:t>
+              <a:t>Demo: Coverage</a:t>
             </a:r>
           </a:p>
         </p:txBody>
@@ -19588,13 +20456,15 @@
         </p:nvSpPr>
         <p:spPr>
           <a:xfrm>
-            <a:off x="548640" y="1234440"/>
-            <a:ext cx="11064240" cy="4937760"/>
+            <a:off x="548640" y="1051560"/>
+            <a:ext cx="11064240" cy="914400"/>
           </a:xfrm>
           <a:prstGeom prst="rect">
             <a:avLst/>
           </a:prstGeom>
-          <a:noFill/>
+          <a:solidFill>
+            <a:srgbClr val="F4F4F4"/>
+          </a:solidFill>
         </p:spPr>
         <p:txBody>
           <a:bodyPr wrap="square">
@@ -19607,81 +20477,48 @@
                 <a:spcPts val="2200"/>
               </a:lnSpc>
               <a:spcAft>
-                <a:spcPts val="1000"/>
-              </a:spcAft>
-              <a:defRPr sz="2000" b="0">
-                <a:solidFill>
-                  <a:srgbClr val="333333"/>
-                </a:solidFill>
-                <a:latin typeface="Calibri"/>
-              </a:defRPr>
-            </a:pPr>
-            <a:r>
-              <a:t>• Master advanced UVM features and patterns</a:t>
-            </a:r>
-          </a:p>
-          <a:p>
-            <a:pPr>
-              <a:lnSpc>
-                <a:spcPts val="2200"/>
-              </a:lnSpc>
-              <a:spcAft>
-                <a:spcPts val="1000"/>
-              </a:spcAft>
-              <a:defRPr sz="2000" b="0">
-                <a:solidFill>
-                  <a:srgbClr val="333333"/>
-                </a:solidFill>
-                <a:latin typeface="Calibri"/>
-              </a:defRPr>
-            </a:pPr>
-            <a:r>
-              <a:t>• Complete module5/CHECKLIST.md</a:t>
-            </a:r>
-          </a:p>
-          <a:p>
-            <a:pPr>
-              <a:lnSpc>
-                <a:spcPts val="2200"/>
-              </a:lnSpc>
-              <a:spcAft>
-                <a:spcPts val="1000"/>
-              </a:spcAft>
-              <a:defRPr sz="2000" b="0">
-                <a:solidFill>
-                  <a:srgbClr val="333333"/>
-                </a:solidFill>
-                <a:latin typeface="Calibri"/>
-              </a:defRPr>
-            </a:pPr>
-            <a:r>
-              <a:t>• Run ./scripts/module5.sh --check</a:t>
-            </a:r>
-          </a:p>
-          <a:p>
-            <a:pPr>
-              <a:lnSpc>
-                <a:spcPts val="2200"/>
-              </a:lnSpc>
-              <a:spcAft>
-                <a:spcPts val="1000"/>
-              </a:spcAft>
-              <a:defRPr sz="2000" b="0">
-                <a:solidFill>
-                  <a:srgbClr val="333333"/>
-                </a:solidFill>
-                <a:latin typeface="Calibri"/>
-              </a:defRPr>
-            </a:pPr>
-            <a:r>
-              <a:t>• Next: Next module in course</a:t>
-            </a:r>
-          </a:p>
-        </p:txBody>
-      </p:sp>
-      <p:sp>
-        <p:nvSpPr>
-          <p:cNvPr id="4" name="TextBox 3"/>
+                <a:spcPts val="200"/>
+              </a:spcAft>
+              <a:defRPr sz="2000" b="0">
+                <a:solidFill>
+                  <a:srgbClr val="333333"/>
+                </a:solidFill>
+                <a:latin typeface="Consolas"/>
+              </a:defRPr>
+            </a:pPr>
+            <a:r>
+              <a:t>$ ./scripts/module5.sh --coverage</a:t>
+            </a:r>
+          </a:p>
+        </p:txBody>
+      </p:sp>
+      <p:pic>
+        <p:nvPicPr>
+          <p:cNvPr id="4" name="Picture 3" descr="ex02_coverage.png"/>
+          <p:cNvPicPr>
+            <a:picLocks noChangeAspect="1"/>
+          </p:cNvPicPr>
+          <p:nvPr/>
+        </p:nvPicPr>
+        <p:blipFill>
+          <a:blip r:embed="rId2"/>
+          <a:stretch>
+            <a:fillRect/>
+          </a:stretch>
+        </p:blipFill>
+        <p:spPr>
+          <a:xfrm>
+            <a:off x="548640" y="1965960"/>
+            <a:ext cx="7071358" cy="3977639"/>
+          </a:xfrm>
+          <a:prstGeom prst="rect">
+            <a:avLst/>
+          </a:prstGeom>
+        </p:spPr>
+      </p:pic>
+      <p:sp>
+        <p:nvSpPr>
+          <p:cNvPr id="5" name="TextBox 4"/>
           <p:cNvSpPr txBox="1"/>
           <p:nvPr/>
         </p:nvSpPr>
@@ -19822,6 +20659,1935 @@
 </p:sld>
 </file>
 
+<file path=ppt/slides/slide60.xml><?xml version="1.0" encoding="utf-8"?>
+<p:sld xmlns:a="http://schemas.openxmlformats.org/drawingml/2006/main" xmlns:p="http://schemas.openxmlformats.org/presentationml/2006/main" xmlns:r="http://schemas.openxmlformats.org/officeDocument/2006/relationships">
+  <p:cSld>
+    <p:spTree>
+      <p:nvGrpSpPr>
+        <p:cNvPr id="1" name=""/>
+        <p:cNvGrpSpPr/>
+        <p:nvPr/>
+      </p:nvGrpSpPr>
+      <p:grpSpPr/>
+      <p:sp>
+        <p:nvSpPr>
+          <p:cNvPr id="2" name="TextBox 1"/>
+          <p:cNvSpPr txBox="1"/>
+          <p:nvPr/>
+        </p:nvSpPr>
+        <p:spPr>
+          <a:xfrm>
+            <a:off x="548640" y="411480"/>
+            <a:ext cx="11064240" cy="777240"/>
+          </a:xfrm>
+          <a:prstGeom prst="rect">
+            <a:avLst/>
+          </a:prstGeom>
+          <a:noFill/>
+        </p:spPr>
+        <p:txBody>
+          <a:bodyPr wrap="square">
+            <a:noAutofit/>
+          </a:bodyPr>
+          <a:lstStyle/>
+          <a:p>
+            <a:pPr>
+              <a:lnSpc>
+                <a:spcPts val="2200"/>
+              </a:lnSpc>
+              <a:defRPr sz="2800" b="1">
+                <a:solidFill>
+                  <a:srgbClr val="1A1A2E"/>
+                </a:solidFill>
+                <a:latin typeface="Calibri"/>
+              </a:defRPr>
+            </a:pPr>
+            <a:r>
+              <a:t>Example 3: Advanced Configuration</a:t>
+            </a:r>
+          </a:p>
+        </p:txBody>
+      </p:sp>
+      <p:sp>
+        <p:nvSpPr>
+          <p:cNvPr id="3" name="TextBox 2"/>
+          <p:cNvSpPr txBox="1"/>
+          <p:nvPr/>
+        </p:nvSpPr>
+        <p:spPr>
+          <a:xfrm>
+            <a:off x="548640" y="1234440"/>
+            <a:ext cx="11064240" cy="4937760"/>
+          </a:xfrm>
+          <a:prstGeom prst="rect">
+            <a:avLst/>
+          </a:prstGeom>
+          <a:noFill/>
+        </p:spPr>
+        <p:txBody>
+          <a:bodyPr wrap="square">
+            <a:noAutofit/>
+          </a:bodyPr>
+          <a:lstStyle/>
+          <a:p>
+            <a:pPr>
+              <a:lnSpc>
+                <a:spcPts val="2200"/>
+              </a:lnSpc>
+              <a:spcAft>
+                <a:spcPts val="1000"/>
+              </a:spcAft>
+              <a:defRPr sz="2000" b="0">
+                <a:solidFill>
+                  <a:srgbClr val="333333"/>
+                </a:solidFill>
+                <a:latin typeface="Calibri"/>
+              </a:defRPr>
+            </a:pPr>
+            <a:r>
+              <a:t>• AgentConfig: Complex configuration object with</a:t>
+            </a:r>
+          </a:p>
+          <a:p>
+            <a:pPr>
+              <a:lnSpc>
+                <a:spcPts val="2200"/>
+              </a:lnSpc>
+              <a:spcAft>
+                <a:spcPts val="1000"/>
+              </a:spcAft>
+              <a:defRPr sz="2000" b="0">
+                <a:solidFill>
+                  <a:srgbClr val="333333"/>
+                </a:solidFill>
+                <a:latin typeface="Calibri"/>
+              </a:defRPr>
+            </a:pPr>
+            <a:r>
+              <a:t>      multiple fields</a:t>
+            </a:r>
+          </a:p>
+          <a:p>
+            <a:pPr>
+              <a:lnSpc>
+                <a:spcPts val="2200"/>
+              </a:lnSpc>
+              <a:spcAft>
+                <a:spcPts val="1000"/>
+              </a:spcAft>
+              <a:defRPr sz="2000" b="0">
+                <a:solidFill>
+                  <a:srgbClr val="333333"/>
+                </a:solidFill>
+                <a:latin typeface="Calibri"/>
+              </a:defRPr>
+            </a:pPr>
+            <a:r>
+              <a:t>• EnvConfig: Environment-level configuration</a:t>
+            </a:r>
+          </a:p>
+          <a:p>
+            <a:pPr>
+              <a:lnSpc>
+                <a:spcPts val="2200"/>
+              </a:lnSpc>
+              <a:spcAft>
+                <a:spcPts val="1000"/>
+              </a:spcAft>
+              <a:defRPr sz="2000" b="0">
+                <a:solidFill>
+                  <a:srgbClr val="333333"/>
+                </a:solidFill>
+                <a:latin typeface="Calibri"/>
+              </a:defRPr>
+            </a:pPr>
+            <a:r>
+              <a:t>      containing agent configs</a:t>
+            </a:r>
+          </a:p>
+          <a:p>
+            <a:pPr>
+              <a:lnSpc>
+                <a:spcPts val="2200"/>
+              </a:lnSpc>
+              <a:spcAft>
+                <a:spcPts val="1000"/>
+              </a:spcAft>
+              <a:defRPr sz="2000" b="0">
+                <a:solidFill>
+                  <a:srgbClr val="333333"/>
+                </a:solidFill>
+                <a:latin typeface="Calibri"/>
+              </a:defRPr>
+            </a:pPr>
+            <a:r>
+              <a:t>• Configuration Hierarchy: Multi-level configuration</a:t>
+            </a:r>
+          </a:p>
+          <a:p>
+            <a:pPr>
+              <a:lnSpc>
+                <a:spcPts val="2200"/>
+              </a:lnSpc>
+              <a:spcAft>
+                <a:spcPts val="1000"/>
+              </a:spcAft>
+              <a:defRPr sz="2000" b="0">
+                <a:solidFill>
+                  <a:srgbClr val="333333"/>
+                </a:solidFill>
+                <a:latin typeface="Calibri"/>
+              </a:defRPr>
+            </a:pPr>
+            <a:r>
+              <a:t>      structure</a:t>
+            </a:r>
+          </a:p>
+        </p:txBody>
+      </p:sp>
+      <p:sp>
+        <p:nvSpPr>
+          <p:cNvPr id="4" name="TextBox 3"/>
+          <p:cNvSpPr txBox="1"/>
+          <p:nvPr/>
+        </p:nvSpPr>
+        <p:spPr>
+          <a:xfrm>
+            <a:off x="548640" y="6355080"/>
+            <a:ext cx="11064240" cy="320040"/>
+          </a:xfrm>
+          <a:prstGeom prst="rect">
+            <a:avLst/>
+          </a:prstGeom>
+          <a:noFill/>
+        </p:spPr>
+        <p:txBody>
+          <a:bodyPr wrap="square">
+            <a:noAutofit/>
+          </a:bodyPr>
+          <a:lstStyle/>
+          <a:p>
+            <a:pPr algn="r">
+              <a:lnSpc>
+                <a:spcPts val="2200"/>
+              </a:lnSpc>
+              <a:defRPr sz="1000" b="0">
+                <a:solidFill>
+                  <a:srgbClr val="666666"/>
+                </a:solidFill>
+                <a:latin typeface="Calibri"/>
+              </a:defRPr>
+            </a:pPr>
+            <a:r>
+              <a:t>learn_uvm2017_sv_verilator / Module 5</a:t>
+            </a:r>
+          </a:p>
+        </p:txBody>
+      </p:sp>
+    </p:spTree>
+  </p:cSld>
+  <p:clrMapOvr>
+    <a:masterClrMapping/>
+  </p:clrMapOvr>
+</p:sld>
+</file>
+
+<file path=ppt/slides/slide61.xml><?xml version="1.0" encoding="utf-8"?>
+<p:sld xmlns:a="http://schemas.openxmlformats.org/drawingml/2006/main" xmlns:p="http://schemas.openxmlformats.org/presentationml/2006/main" xmlns:r="http://schemas.openxmlformats.org/officeDocument/2006/relationships">
+  <p:cSld>
+    <p:spTree>
+      <p:nvGrpSpPr>
+        <p:cNvPr id="1" name=""/>
+        <p:cNvGrpSpPr/>
+        <p:nvPr/>
+      </p:nvGrpSpPr>
+      <p:grpSpPr/>
+      <p:sp>
+        <p:nvSpPr>
+          <p:cNvPr id="2" name="TextBox 1"/>
+          <p:cNvSpPr txBox="1"/>
+          <p:nvPr/>
+        </p:nvSpPr>
+        <p:spPr>
+          <a:xfrm>
+            <a:off x="548640" y="411480"/>
+            <a:ext cx="11064240" cy="777240"/>
+          </a:xfrm>
+          <a:prstGeom prst="rect">
+            <a:avLst/>
+          </a:prstGeom>
+          <a:noFill/>
+        </p:spPr>
+        <p:txBody>
+          <a:bodyPr wrap="square">
+            <a:noAutofit/>
+          </a:bodyPr>
+          <a:lstStyle/>
+          <a:p>
+            <a:pPr>
+              <a:lnSpc>
+                <a:spcPts val="2200"/>
+              </a:lnSpc>
+              <a:defRPr sz="2800" b="1">
+                <a:solidFill>
+                  <a:srgbClr val="1A1A2E"/>
+                </a:solidFill>
+                <a:latin typeface="Calibri"/>
+              </a:defRPr>
+            </a:pPr>
+            <a:r>
+              <a:t>Demo: Advanced Configuration</a:t>
+            </a:r>
+          </a:p>
+        </p:txBody>
+      </p:sp>
+      <p:sp>
+        <p:nvSpPr>
+          <p:cNvPr id="3" name="TextBox 2"/>
+          <p:cNvSpPr txBox="1"/>
+          <p:nvPr/>
+        </p:nvSpPr>
+        <p:spPr>
+          <a:xfrm>
+            <a:off x="548640" y="1051560"/>
+            <a:ext cx="11064240" cy="914400"/>
+          </a:xfrm>
+          <a:prstGeom prst="rect">
+            <a:avLst/>
+          </a:prstGeom>
+          <a:solidFill>
+            <a:srgbClr val="F4F4F4"/>
+          </a:solidFill>
+        </p:spPr>
+        <p:txBody>
+          <a:bodyPr wrap="square">
+            <a:noAutofit/>
+          </a:bodyPr>
+          <a:lstStyle/>
+          <a:p>
+            <a:pPr>
+              <a:lnSpc>
+                <a:spcPts val="2200"/>
+              </a:lnSpc>
+              <a:spcAft>
+                <a:spcPts val="200"/>
+              </a:spcAft>
+              <a:defRPr sz="2000" b="0">
+                <a:solidFill>
+                  <a:srgbClr val="333333"/>
+                </a:solidFill>
+                <a:latin typeface="Consolas"/>
+              </a:defRPr>
+            </a:pPr>
+            <a:r>
+              <a:t>$ ./scripts/module5.sh --configuration</a:t>
+            </a:r>
+          </a:p>
+        </p:txBody>
+      </p:sp>
+      <p:pic>
+        <p:nvPicPr>
+          <p:cNvPr id="4" name="Picture 3" descr="ex03_configuration.png"/>
+          <p:cNvPicPr>
+            <a:picLocks noChangeAspect="1"/>
+          </p:cNvPicPr>
+          <p:nvPr/>
+        </p:nvPicPr>
+        <p:blipFill>
+          <a:blip r:embed="rId2"/>
+          <a:stretch>
+            <a:fillRect/>
+          </a:stretch>
+        </p:blipFill>
+        <p:spPr>
+          <a:xfrm>
+            <a:off x="548640" y="1965960"/>
+            <a:ext cx="7071358" cy="3977639"/>
+          </a:xfrm>
+          <a:prstGeom prst="rect">
+            <a:avLst/>
+          </a:prstGeom>
+        </p:spPr>
+      </p:pic>
+      <p:sp>
+        <p:nvSpPr>
+          <p:cNvPr id="5" name="TextBox 4"/>
+          <p:cNvSpPr txBox="1"/>
+          <p:nvPr/>
+        </p:nvSpPr>
+        <p:spPr>
+          <a:xfrm>
+            <a:off x="548640" y="6355080"/>
+            <a:ext cx="11064240" cy="320040"/>
+          </a:xfrm>
+          <a:prstGeom prst="rect">
+            <a:avLst/>
+          </a:prstGeom>
+          <a:noFill/>
+        </p:spPr>
+        <p:txBody>
+          <a:bodyPr wrap="square">
+            <a:noAutofit/>
+          </a:bodyPr>
+          <a:lstStyle/>
+          <a:p>
+            <a:pPr algn="r">
+              <a:lnSpc>
+                <a:spcPts val="2200"/>
+              </a:lnSpc>
+              <a:defRPr sz="1000" b="0">
+                <a:solidFill>
+                  <a:srgbClr val="666666"/>
+                </a:solidFill>
+                <a:latin typeface="Calibri"/>
+              </a:defRPr>
+            </a:pPr>
+            <a:r>
+              <a:t>learn_uvm2017_sv_verilator / Module 5</a:t>
+            </a:r>
+          </a:p>
+        </p:txBody>
+      </p:sp>
+    </p:spTree>
+  </p:cSld>
+  <p:clrMapOvr>
+    <a:masterClrMapping/>
+  </p:clrMapOvr>
+</p:sld>
+</file>
+
+<file path=ppt/slides/slide62.xml><?xml version="1.0" encoding="utf-8"?>
+<p:sld xmlns:a="http://schemas.openxmlformats.org/drawingml/2006/main" xmlns:p="http://schemas.openxmlformats.org/presentationml/2006/main" xmlns:r="http://schemas.openxmlformats.org/officeDocument/2006/relationships">
+  <p:cSld>
+    <p:spTree>
+      <p:nvGrpSpPr>
+        <p:cNvPr id="1" name=""/>
+        <p:cNvGrpSpPr/>
+        <p:nvPr/>
+      </p:nvGrpSpPr>
+      <p:grpSpPr/>
+      <p:sp>
+        <p:nvSpPr>
+          <p:cNvPr id="2" name="TextBox 1"/>
+          <p:cNvSpPr txBox="1"/>
+          <p:nvPr/>
+        </p:nvSpPr>
+        <p:spPr>
+          <a:xfrm>
+            <a:off x="548640" y="411480"/>
+            <a:ext cx="11064240" cy="777240"/>
+          </a:xfrm>
+          <a:prstGeom prst="rect">
+            <a:avLst/>
+          </a:prstGeom>
+          <a:noFill/>
+        </p:spPr>
+        <p:txBody>
+          <a:bodyPr wrap="square">
+            <a:noAutofit/>
+          </a:bodyPr>
+          <a:lstStyle/>
+          <a:p>
+            <a:pPr>
+              <a:lnSpc>
+                <a:spcPts val="2200"/>
+              </a:lnSpc>
+              <a:defRPr sz="2800" b="1">
+                <a:solidFill>
+                  <a:srgbClr val="1A1A2E"/>
+                </a:solidFill>
+                <a:latin typeface="Calibri"/>
+              </a:defRPr>
+            </a:pPr>
+            <a:r>
+              <a:t>Example 4: Callbacks</a:t>
+            </a:r>
+          </a:p>
+        </p:txBody>
+      </p:sp>
+      <p:sp>
+        <p:nvSpPr>
+          <p:cNvPr id="3" name="TextBox 2"/>
+          <p:cNvSpPr txBox="1"/>
+          <p:nvPr/>
+        </p:nvSpPr>
+        <p:spPr>
+          <a:xfrm>
+            <a:off x="548640" y="1234440"/>
+            <a:ext cx="11064240" cy="4937760"/>
+          </a:xfrm>
+          <a:prstGeom prst="rect">
+            <a:avLst/>
+          </a:prstGeom>
+          <a:noFill/>
+        </p:spPr>
+        <p:txBody>
+          <a:bodyPr wrap="square">
+            <a:noAutofit/>
+          </a:bodyPr>
+          <a:lstStyle/>
+          <a:p>
+            <a:pPr>
+              <a:lnSpc>
+                <a:spcPts val="2200"/>
+              </a:lnSpc>
+              <a:spcAft>
+                <a:spcPts val="1000"/>
+              </a:spcAft>
+              <a:defRPr sz="2000" b="0">
+                <a:solidFill>
+                  <a:srgbClr val="333333"/>
+                </a:solidFill>
+                <a:latin typeface="Calibri"/>
+              </a:defRPr>
+            </a:pPr>
+            <a:r>
+              <a:t>• DriverCallbackBase: Base callback class for driver</a:t>
+            </a:r>
+          </a:p>
+          <a:p>
+            <a:pPr>
+              <a:lnSpc>
+                <a:spcPts val="2200"/>
+              </a:lnSpc>
+              <a:spcAft>
+                <a:spcPts val="1000"/>
+              </a:spcAft>
+              <a:defRPr sz="2000" b="0">
+                <a:solidFill>
+                  <a:srgbClr val="333333"/>
+                </a:solidFill>
+                <a:latin typeface="Calibri"/>
+              </a:defRPr>
+            </a:pPr>
+            <a:r>
+              <a:t>• DriverCallback: Driver callback implementation</a:t>
+            </a:r>
+          </a:p>
+          <a:p>
+            <a:pPr>
+              <a:lnSpc>
+                <a:spcPts val="2200"/>
+              </a:lnSpc>
+              <a:spcAft>
+                <a:spcPts val="1000"/>
+              </a:spcAft>
+              <a:defRPr sz="2000" b="0">
+                <a:solidFill>
+                  <a:srgbClr val="333333"/>
+                </a:solidFill>
+                <a:latin typeface="Calibri"/>
+              </a:defRPr>
+            </a:pPr>
+            <a:r>
+              <a:t>• MonitorCallbackBase: Base callback class for monitor</a:t>
+            </a:r>
+          </a:p>
+        </p:txBody>
+      </p:sp>
+      <p:sp>
+        <p:nvSpPr>
+          <p:cNvPr id="4" name="TextBox 3"/>
+          <p:cNvSpPr txBox="1"/>
+          <p:nvPr/>
+        </p:nvSpPr>
+        <p:spPr>
+          <a:xfrm>
+            <a:off x="548640" y="6355080"/>
+            <a:ext cx="11064240" cy="320040"/>
+          </a:xfrm>
+          <a:prstGeom prst="rect">
+            <a:avLst/>
+          </a:prstGeom>
+          <a:noFill/>
+        </p:spPr>
+        <p:txBody>
+          <a:bodyPr wrap="square">
+            <a:noAutofit/>
+          </a:bodyPr>
+          <a:lstStyle/>
+          <a:p>
+            <a:pPr algn="r">
+              <a:lnSpc>
+                <a:spcPts val="2200"/>
+              </a:lnSpc>
+              <a:defRPr sz="1000" b="0">
+                <a:solidFill>
+                  <a:srgbClr val="666666"/>
+                </a:solidFill>
+                <a:latin typeface="Calibri"/>
+              </a:defRPr>
+            </a:pPr>
+            <a:r>
+              <a:t>learn_uvm2017_sv_verilator / Module 5</a:t>
+            </a:r>
+          </a:p>
+        </p:txBody>
+      </p:sp>
+    </p:spTree>
+  </p:cSld>
+  <p:clrMapOvr>
+    <a:masterClrMapping/>
+  </p:clrMapOvr>
+</p:sld>
+</file>
+
+<file path=ppt/slides/slide63.xml><?xml version="1.0" encoding="utf-8"?>
+<p:sld xmlns:a="http://schemas.openxmlformats.org/drawingml/2006/main" xmlns:p="http://schemas.openxmlformats.org/presentationml/2006/main" xmlns:r="http://schemas.openxmlformats.org/officeDocument/2006/relationships">
+  <p:cSld>
+    <p:spTree>
+      <p:nvGrpSpPr>
+        <p:cNvPr id="1" name=""/>
+        <p:cNvGrpSpPr/>
+        <p:nvPr/>
+      </p:nvGrpSpPr>
+      <p:grpSpPr/>
+      <p:sp>
+        <p:nvSpPr>
+          <p:cNvPr id="2" name="TextBox 1"/>
+          <p:cNvSpPr txBox="1"/>
+          <p:nvPr/>
+        </p:nvSpPr>
+        <p:spPr>
+          <a:xfrm>
+            <a:off x="548640" y="411480"/>
+            <a:ext cx="11064240" cy="777240"/>
+          </a:xfrm>
+          <a:prstGeom prst="rect">
+            <a:avLst/>
+          </a:prstGeom>
+          <a:noFill/>
+        </p:spPr>
+        <p:txBody>
+          <a:bodyPr wrap="square">
+            <a:noAutofit/>
+          </a:bodyPr>
+          <a:lstStyle/>
+          <a:p>
+            <a:pPr>
+              <a:lnSpc>
+                <a:spcPts val="2200"/>
+              </a:lnSpc>
+              <a:defRPr sz="2800" b="1">
+                <a:solidFill>
+                  <a:srgbClr val="1A1A2E"/>
+                </a:solidFill>
+                <a:latin typeface="Calibri"/>
+              </a:defRPr>
+            </a:pPr>
+            <a:r>
+              <a:t>Demo: Callbacks</a:t>
+            </a:r>
+          </a:p>
+        </p:txBody>
+      </p:sp>
+      <p:sp>
+        <p:nvSpPr>
+          <p:cNvPr id="3" name="TextBox 2"/>
+          <p:cNvSpPr txBox="1"/>
+          <p:nvPr/>
+        </p:nvSpPr>
+        <p:spPr>
+          <a:xfrm>
+            <a:off x="548640" y="1051560"/>
+            <a:ext cx="11064240" cy="914400"/>
+          </a:xfrm>
+          <a:prstGeom prst="rect">
+            <a:avLst/>
+          </a:prstGeom>
+          <a:solidFill>
+            <a:srgbClr val="F4F4F4"/>
+          </a:solidFill>
+        </p:spPr>
+        <p:txBody>
+          <a:bodyPr wrap="square">
+            <a:noAutofit/>
+          </a:bodyPr>
+          <a:lstStyle/>
+          <a:p>
+            <a:pPr>
+              <a:lnSpc>
+                <a:spcPts val="2200"/>
+              </a:lnSpc>
+              <a:spcAft>
+                <a:spcPts val="200"/>
+              </a:spcAft>
+              <a:defRPr sz="2000" b="0">
+                <a:solidFill>
+                  <a:srgbClr val="333333"/>
+                </a:solidFill>
+                <a:latin typeface="Consolas"/>
+              </a:defRPr>
+            </a:pPr>
+            <a:r>
+              <a:t>$ ./scripts/module5.sh --callbacks</a:t>
+            </a:r>
+          </a:p>
+        </p:txBody>
+      </p:sp>
+      <p:pic>
+        <p:nvPicPr>
+          <p:cNvPr id="4" name="Picture 3" descr="ex04_callbacks.png"/>
+          <p:cNvPicPr>
+            <a:picLocks noChangeAspect="1"/>
+          </p:cNvPicPr>
+          <p:nvPr/>
+        </p:nvPicPr>
+        <p:blipFill>
+          <a:blip r:embed="rId2"/>
+          <a:stretch>
+            <a:fillRect/>
+          </a:stretch>
+        </p:blipFill>
+        <p:spPr>
+          <a:xfrm>
+            <a:off x="548640" y="1965960"/>
+            <a:ext cx="7071358" cy="3977639"/>
+          </a:xfrm>
+          <a:prstGeom prst="rect">
+            <a:avLst/>
+          </a:prstGeom>
+        </p:spPr>
+      </p:pic>
+      <p:sp>
+        <p:nvSpPr>
+          <p:cNvPr id="5" name="TextBox 4"/>
+          <p:cNvSpPr txBox="1"/>
+          <p:nvPr/>
+        </p:nvSpPr>
+        <p:spPr>
+          <a:xfrm>
+            <a:off x="548640" y="6355080"/>
+            <a:ext cx="11064240" cy="320040"/>
+          </a:xfrm>
+          <a:prstGeom prst="rect">
+            <a:avLst/>
+          </a:prstGeom>
+          <a:noFill/>
+        </p:spPr>
+        <p:txBody>
+          <a:bodyPr wrap="square">
+            <a:noAutofit/>
+          </a:bodyPr>
+          <a:lstStyle/>
+          <a:p>
+            <a:pPr algn="r">
+              <a:lnSpc>
+                <a:spcPts val="2200"/>
+              </a:lnSpc>
+              <a:defRPr sz="1000" b="0">
+                <a:solidFill>
+                  <a:srgbClr val="666666"/>
+                </a:solidFill>
+                <a:latin typeface="Calibri"/>
+              </a:defRPr>
+            </a:pPr>
+            <a:r>
+              <a:t>learn_uvm2017_sv_verilator / Module 5</a:t>
+            </a:r>
+          </a:p>
+        </p:txBody>
+      </p:sp>
+    </p:spTree>
+  </p:cSld>
+  <p:clrMapOvr>
+    <a:masterClrMapping/>
+  </p:clrMapOvr>
+</p:sld>
+</file>
+
+<file path=ppt/slides/slide64.xml><?xml version="1.0" encoding="utf-8"?>
+<p:sld xmlns:a="http://schemas.openxmlformats.org/drawingml/2006/main" xmlns:p="http://schemas.openxmlformats.org/presentationml/2006/main" xmlns:r="http://schemas.openxmlformats.org/officeDocument/2006/relationships">
+  <p:cSld>
+    <p:spTree>
+      <p:nvGrpSpPr>
+        <p:cNvPr id="1" name=""/>
+        <p:cNvGrpSpPr/>
+        <p:nvPr/>
+      </p:nvGrpSpPr>
+      <p:grpSpPr/>
+      <p:sp>
+        <p:nvSpPr>
+          <p:cNvPr id="2" name="TextBox 1"/>
+          <p:cNvSpPr txBox="1"/>
+          <p:nvPr/>
+        </p:nvSpPr>
+        <p:spPr>
+          <a:xfrm>
+            <a:off x="548640" y="411480"/>
+            <a:ext cx="11064240" cy="777240"/>
+          </a:xfrm>
+          <a:prstGeom prst="rect">
+            <a:avLst/>
+          </a:prstGeom>
+          <a:noFill/>
+        </p:spPr>
+        <p:txBody>
+          <a:bodyPr wrap="square">
+            <a:noAutofit/>
+          </a:bodyPr>
+          <a:lstStyle/>
+          <a:p>
+            <a:pPr>
+              <a:lnSpc>
+                <a:spcPts val="2200"/>
+              </a:lnSpc>
+              <a:defRPr sz="2800" b="1">
+                <a:solidFill>
+                  <a:srgbClr val="1A1A2E"/>
+                </a:solidFill>
+                <a:latin typeface="Calibri"/>
+              </a:defRPr>
+            </a:pPr>
+            <a:r>
+              <a:t>Example 5: Register Model</a:t>
+            </a:r>
+          </a:p>
+        </p:txBody>
+      </p:sp>
+      <p:sp>
+        <p:nvSpPr>
+          <p:cNvPr id="3" name="TextBox 2"/>
+          <p:cNvSpPr txBox="1"/>
+          <p:nvPr/>
+        </p:nvSpPr>
+        <p:spPr>
+          <a:xfrm>
+            <a:off x="548640" y="1234440"/>
+            <a:ext cx="11064240" cy="4937760"/>
+          </a:xfrm>
+          <a:prstGeom prst="rect">
+            <a:avLst/>
+          </a:prstGeom>
+          <a:noFill/>
+        </p:spPr>
+        <p:txBody>
+          <a:bodyPr wrap="square">
+            <a:noAutofit/>
+          </a:bodyPr>
+          <a:lstStyle/>
+          <a:p>
+            <a:pPr>
+              <a:lnSpc>
+                <a:spcPts val="2200"/>
+              </a:lnSpc>
+              <a:spcAft>
+                <a:spcPts val="1000"/>
+              </a:spcAft>
+              <a:defRPr sz="2000" b="0">
+                <a:solidFill>
+                  <a:srgbClr val="333333"/>
+                </a:solidFill>
+                <a:latin typeface="Calibri"/>
+              </a:defRPr>
+            </a:pPr>
+            <a:r>
+              <a:t>• RegisterField: Represents a register field with</a:t>
+            </a:r>
+          </a:p>
+          <a:p>
+            <a:pPr>
+              <a:lnSpc>
+                <a:spcPts val="2200"/>
+              </a:lnSpc>
+              <a:spcAft>
+                <a:spcPts val="1000"/>
+              </a:spcAft>
+              <a:defRPr sz="2000" b="0">
+                <a:solidFill>
+                  <a:srgbClr val="333333"/>
+                </a:solidFill>
+                <a:latin typeface="Calibri"/>
+              </a:defRPr>
+            </a:pPr>
+            <a:r>
+              <a:t>      offset, width, and value</a:t>
+            </a:r>
+          </a:p>
+          <a:p>
+            <a:pPr>
+              <a:lnSpc>
+                <a:spcPts val="2200"/>
+              </a:lnSpc>
+              <a:spcAft>
+                <a:spcPts val="1000"/>
+              </a:spcAft>
+              <a:defRPr sz="2000" b="0">
+                <a:solidFill>
+                  <a:srgbClr val="333333"/>
+                </a:solidFill>
+                <a:latin typeface="Calibri"/>
+              </a:defRPr>
+            </a:pPr>
+            <a:r>
+              <a:t>• Register: Represents a register with address and</a:t>
+            </a:r>
+          </a:p>
+          <a:p>
+            <a:pPr>
+              <a:lnSpc>
+                <a:spcPts val="2200"/>
+              </a:lnSpc>
+              <a:spcAft>
+                <a:spcPts val="1000"/>
+              </a:spcAft>
+              <a:defRPr sz="2000" b="0">
+                <a:solidFill>
+                  <a:srgbClr val="333333"/>
+                </a:solidFill>
+                <a:latin typeface="Calibri"/>
+              </a:defRPr>
+            </a:pPr>
+            <a:r>
+              <a:t>      fields</a:t>
+            </a:r>
+          </a:p>
+          <a:p>
+            <a:pPr>
+              <a:lnSpc>
+                <a:spcPts val="2200"/>
+              </a:lnSpc>
+              <a:spcAft>
+                <a:spcPts val="1000"/>
+              </a:spcAft>
+              <a:defRPr sz="2000" b="0">
+                <a:solidFill>
+                  <a:srgbClr val="333333"/>
+                </a:solidFill>
+                <a:latin typeface="Calibri"/>
+              </a:defRPr>
+            </a:pPr>
+            <a:r>
+              <a:t>• RegisterBlock: Represents a register block with</a:t>
+            </a:r>
+          </a:p>
+          <a:p>
+            <a:pPr>
+              <a:lnSpc>
+                <a:spcPts val="2200"/>
+              </a:lnSpc>
+              <a:spcAft>
+                <a:spcPts val="1000"/>
+              </a:spcAft>
+              <a:defRPr sz="2000" b="0">
+                <a:solidFill>
+                  <a:srgbClr val="333333"/>
+                </a:solidFill>
+                <a:latin typeface="Calibri"/>
+              </a:defRPr>
+            </a:pPr>
+            <a:r>
+              <a:t>      multiple registers</a:t>
+            </a:r>
+          </a:p>
+        </p:txBody>
+      </p:sp>
+      <p:sp>
+        <p:nvSpPr>
+          <p:cNvPr id="4" name="TextBox 3"/>
+          <p:cNvSpPr txBox="1"/>
+          <p:nvPr/>
+        </p:nvSpPr>
+        <p:spPr>
+          <a:xfrm>
+            <a:off x="548640" y="6355080"/>
+            <a:ext cx="11064240" cy="320040"/>
+          </a:xfrm>
+          <a:prstGeom prst="rect">
+            <a:avLst/>
+          </a:prstGeom>
+          <a:noFill/>
+        </p:spPr>
+        <p:txBody>
+          <a:bodyPr wrap="square">
+            <a:noAutofit/>
+          </a:bodyPr>
+          <a:lstStyle/>
+          <a:p>
+            <a:pPr algn="r">
+              <a:lnSpc>
+                <a:spcPts val="2200"/>
+              </a:lnSpc>
+              <a:defRPr sz="1000" b="0">
+                <a:solidFill>
+                  <a:srgbClr val="666666"/>
+                </a:solidFill>
+                <a:latin typeface="Calibri"/>
+              </a:defRPr>
+            </a:pPr>
+            <a:r>
+              <a:t>learn_uvm2017_sv_verilator / Module 5</a:t>
+            </a:r>
+          </a:p>
+        </p:txBody>
+      </p:sp>
+    </p:spTree>
+  </p:cSld>
+  <p:clrMapOvr>
+    <a:masterClrMapping/>
+  </p:clrMapOvr>
+</p:sld>
+</file>
+
+<file path=ppt/slides/slide65.xml><?xml version="1.0" encoding="utf-8"?>
+<p:sld xmlns:a="http://schemas.openxmlformats.org/drawingml/2006/main" xmlns:p="http://schemas.openxmlformats.org/presentationml/2006/main" xmlns:r="http://schemas.openxmlformats.org/officeDocument/2006/relationships">
+  <p:cSld>
+    <p:spTree>
+      <p:nvGrpSpPr>
+        <p:cNvPr id="1" name=""/>
+        <p:cNvGrpSpPr/>
+        <p:nvPr/>
+      </p:nvGrpSpPr>
+      <p:grpSpPr/>
+      <p:sp>
+        <p:nvSpPr>
+          <p:cNvPr id="2" name="TextBox 1"/>
+          <p:cNvSpPr txBox="1"/>
+          <p:nvPr/>
+        </p:nvSpPr>
+        <p:spPr>
+          <a:xfrm>
+            <a:off x="548640" y="411480"/>
+            <a:ext cx="11064240" cy="777240"/>
+          </a:xfrm>
+          <a:prstGeom prst="rect">
+            <a:avLst/>
+          </a:prstGeom>
+          <a:noFill/>
+        </p:spPr>
+        <p:txBody>
+          <a:bodyPr wrap="square">
+            <a:noAutofit/>
+          </a:bodyPr>
+          <a:lstStyle/>
+          <a:p>
+            <a:pPr>
+              <a:lnSpc>
+                <a:spcPts val="2200"/>
+              </a:lnSpc>
+              <a:defRPr sz="2800" b="1">
+                <a:solidFill>
+                  <a:srgbClr val="1A1A2E"/>
+                </a:solidFill>
+                <a:latin typeface="Calibri"/>
+              </a:defRPr>
+            </a:pPr>
+            <a:r>
+              <a:t>Demo: Register Model</a:t>
+            </a:r>
+          </a:p>
+        </p:txBody>
+      </p:sp>
+      <p:sp>
+        <p:nvSpPr>
+          <p:cNvPr id="3" name="TextBox 2"/>
+          <p:cNvSpPr txBox="1"/>
+          <p:nvPr/>
+        </p:nvSpPr>
+        <p:spPr>
+          <a:xfrm>
+            <a:off x="548640" y="1051560"/>
+            <a:ext cx="11064240" cy="914400"/>
+          </a:xfrm>
+          <a:prstGeom prst="rect">
+            <a:avLst/>
+          </a:prstGeom>
+          <a:solidFill>
+            <a:srgbClr val="F4F4F4"/>
+          </a:solidFill>
+        </p:spPr>
+        <p:txBody>
+          <a:bodyPr wrap="square">
+            <a:noAutofit/>
+          </a:bodyPr>
+          <a:lstStyle/>
+          <a:p>
+            <a:pPr>
+              <a:lnSpc>
+                <a:spcPts val="2200"/>
+              </a:lnSpc>
+              <a:spcAft>
+                <a:spcPts val="200"/>
+              </a:spcAft>
+              <a:defRPr sz="2000" b="0">
+                <a:solidFill>
+                  <a:srgbClr val="333333"/>
+                </a:solidFill>
+                <a:latin typeface="Consolas"/>
+              </a:defRPr>
+            </a:pPr>
+            <a:r>
+              <a:t>$ ./scripts/module5.sh --register-model</a:t>
+            </a:r>
+          </a:p>
+        </p:txBody>
+      </p:sp>
+      <p:pic>
+        <p:nvPicPr>
+          <p:cNvPr id="4" name="Picture 3" descr="ex05_register_model.png"/>
+          <p:cNvPicPr>
+            <a:picLocks noChangeAspect="1"/>
+          </p:cNvPicPr>
+          <p:nvPr/>
+        </p:nvPicPr>
+        <p:blipFill>
+          <a:blip r:embed="rId2"/>
+          <a:stretch>
+            <a:fillRect/>
+          </a:stretch>
+        </p:blipFill>
+        <p:spPr>
+          <a:xfrm>
+            <a:off x="548640" y="1965960"/>
+            <a:ext cx="7071358" cy="3977639"/>
+          </a:xfrm>
+          <a:prstGeom prst="rect">
+            <a:avLst/>
+          </a:prstGeom>
+        </p:spPr>
+      </p:pic>
+      <p:sp>
+        <p:nvSpPr>
+          <p:cNvPr id="5" name="TextBox 4"/>
+          <p:cNvSpPr txBox="1"/>
+          <p:nvPr/>
+        </p:nvSpPr>
+        <p:spPr>
+          <a:xfrm>
+            <a:off x="548640" y="6355080"/>
+            <a:ext cx="11064240" cy="320040"/>
+          </a:xfrm>
+          <a:prstGeom prst="rect">
+            <a:avLst/>
+          </a:prstGeom>
+          <a:noFill/>
+        </p:spPr>
+        <p:txBody>
+          <a:bodyPr wrap="square">
+            <a:noAutofit/>
+          </a:bodyPr>
+          <a:lstStyle/>
+          <a:p>
+            <a:pPr algn="r">
+              <a:lnSpc>
+                <a:spcPts val="2200"/>
+              </a:lnSpc>
+              <a:defRPr sz="1000" b="0">
+                <a:solidFill>
+                  <a:srgbClr val="666666"/>
+                </a:solidFill>
+                <a:latin typeface="Calibri"/>
+              </a:defRPr>
+            </a:pPr>
+            <a:r>
+              <a:t>learn_uvm2017_sv_verilator / Module 5</a:t>
+            </a:r>
+          </a:p>
+        </p:txBody>
+      </p:sp>
+    </p:spTree>
+  </p:cSld>
+  <p:clrMapOvr>
+    <a:masterClrMapping/>
+  </p:clrMapOvr>
+</p:sld>
+</file>
+
+<file path=ppt/slides/slide66.xml><?xml version="1.0" encoding="utf-8"?>
+<p:sld xmlns:a="http://schemas.openxmlformats.org/drawingml/2006/main" xmlns:p="http://schemas.openxmlformats.org/presentationml/2006/main" xmlns:r="http://schemas.openxmlformats.org/officeDocument/2006/relationships">
+  <p:cSld>
+    <p:spTree>
+      <p:nvGrpSpPr>
+        <p:cNvPr id="1" name=""/>
+        <p:cNvGrpSpPr/>
+        <p:nvPr/>
+      </p:nvGrpSpPr>
+      <p:grpSpPr/>
+      <p:sp>
+        <p:nvSpPr>
+          <p:cNvPr id="2" name="TextBox 1"/>
+          <p:cNvSpPr txBox="1"/>
+          <p:nvPr/>
+        </p:nvSpPr>
+        <p:spPr>
+          <a:xfrm>
+            <a:off x="548640" y="2743200"/>
+            <a:ext cx="11064240" cy="1371600"/>
+          </a:xfrm>
+          <a:prstGeom prst="rect">
+            <a:avLst/>
+          </a:prstGeom>
+          <a:noFill/>
+        </p:spPr>
+        <p:txBody>
+          <a:bodyPr wrap="square">
+            <a:noAutofit/>
+          </a:bodyPr>
+          <a:lstStyle/>
+          <a:p>
+            <a:pPr algn="ctr">
+              <a:lnSpc>
+                <a:spcPts val="2200"/>
+              </a:lnSpc>
+              <a:defRPr sz="3600" b="1">
+                <a:solidFill>
+                  <a:srgbClr val="1A1A2E"/>
+                </a:solidFill>
+                <a:latin typeface="Calibri"/>
+              </a:defRPr>
+            </a:pPr>
+            <a:r>
+              <a:t>Practice &amp; assessment</a:t>
+            </a:r>
+          </a:p>
+        </p:txBody>
+      </p:sp>
+      <p:sp>
+        <p:nvSpPr>
+          <p:cNvPr id="3" name="TextBox 2"/>
+          <p:cNvSpPr txBox="1"/>
+          <p:nvPr/>
+        </p:nvSpPr>
+        <p:spPr>
+          <a:xfrm>
+            <a:off x="548640" y="6355080"/>
+            <a:ext cx="11064240" cy="320040"/>
+          </a:xfrm>
+          <a:prstGeom prst="rect">
+            <a:avLst/>
+          </a:prstGeom>
+          <a:noFill/>
+        </p:spPr>
+        <p:txBody>
+          <a:bodyPr wrap="square">
+            <a:noAutofit/>
+          </a:bodyPr>
+          <a:lstStyle/>
+          <a:p>
+            <a:pPr algn="r">
+              <a:lnSpc>
+                <a:spcPts val="2200"/>
+              </a:lnSpc>
+              <a:defRPr sz="1000" b="0">
+                <a:solidFill>
+                  <a:srgbClr val="666666"/>
+                </a:solidFill>
+                <a:latin typeface="Calibri"/>
+              </a:defRPr>
+            </a:pPr>
+            <a:r>
+              <a:t>learn_uvm2017_sv_verilator / Module 5</a:t>
+            </a:r>
+          </a:p>
+        </p:txBody>
+      </p:sp>
+    </p:spTree>
+  </p:cSld>
+  <p:clrMapOvr>
+    <a:masterClrMapping/>
+  </p:clrMapOvr>
+</p:sld>
+</file>
+
+<file path=ppt/slides/slide67.xml><?xml version="1.0" encoding="utf-8"?>
+<p:sld xmlns:a="http://schemas.openxmlformats.org/drawingml/2006/main" xmlns:p="http://schemas.openxmlformats.org/presentationml/2006/main" xmlns:r="http://schemas.openxmlformats.org/officeDocument/2006/relationships">
+  <p:cSld>
+    <p:spTree>
+      <p:nvGrpSpPr>
+        <p:cNvPr id="1" name=""/>
+        <p:cNvGrpSpPr/>
+        <p:nvPr/>
+      </p:nvGrpSpPr>
+      <p:grpSpPr/>
+      <p:sp>
+        <p:nvSpPr>
+          <p:cNvPr id="2" name="TextBox 1"/>
+          <p:cNvSpPr txBox="1"/>
+          <p:nvPr/>
+        </p:nvSpPr>
+        <p:spPr>
+          <a:xfrm>
+            <a:off x="548640" y="411480"/>
+            <a:ext cx="11064240" cy="777240"/>
+          </a:xfrm>
+          <a:prstGeom prst="rect">
+            <a:avLst/>
+          </a:prstGeom>
+          <a:noFill/>
+        </p:spPr>
+        <p:txBody>
+          <a:bodyPr wrap="square">
+            <a:noAutofit/>
+          </a:bodyPr>
+          <a:lstStyle/>
+          <a:p>
+            <a:pPr>
+              <a:lnSpc>
+                <a:spcPts val="2200"/>
+              </a:lnSpc>
+              <a:defRPr sz="2800" b="1">
+                <a:solidFill>
+                  <a:srgbClr val="1A1A2E"/>
+                </a:solidFill>
+                <a:latin typeface="Calibri"/>
+              </a:defRPr>
+            </a:pPr>
+            <a:r>
+              <a:t>What you should know</a:t>
+            </a:r>
+          </a:p>
+        </p:txBody>
+      </p:sp>
+      <p:sp>
+        <p:nvSpPr>
+          <p:cNvPr id="3" name="TextBox 2"/>
+          <p:cNvSpPr txBox="1"/>
+          <p:nvPr/>
+        </p:nvSpPr>
+        <p:spPr>
+          <a:xfrm>
+            <a:off x="548640" y="1234440"/>
+            <a:ext cx="11064240" cy="4937760"/>
+          </a:xfrm>
+          <a:prstGeom prst="rect">
+            <a:avLst/>
+          </a:prstGeom>
+          <a:noFill/>
+        </p:spPr>
+        <p:txBody>
+          <a:bodyPr wrap="square">
+            <a:noAutofit/>
+          </a:bodyPr>
+          <a:lstStyle/>
+          <a:p>
+            <a:pPr>
+              <a:lnSpc>
+                <a:spcPts val="2200"/>
+              </a:lnSpc>
+              <a:spcAft>
+                <a:spcPts val="1000"/>
+              </a:spcAft>
+              <a:defRPr sz="2000" b="0">
+                <a:solidFill>
+                  <a:srgbClr val="333333"/>
+                </a:solidFill>
+                <a:latin typeface="Calibri"/>
+              </a:defRPr>
+            </a:pPr>
+            <a:r>
+              <a:t>• Implement virtual sequences to coordinate multiple</a:t>
+            </a:r>
+          </a:p>
+          <a:p>
+            <a:pPr>
+              <a:lnSpc>
+                <a:spcPts val="2200"/>
+              </a:lnSpc>
+              <a:spcAft>
+                <a:spcPts val="1000"/>
+              </a:spcAft>
+              <a:defRPr sz="2000" b="0">
+                <a:solidFill>
+                  <a:srgbClr val="333333"/>
+                </a:solidFill>
+                <a:latin typeface="Calibri"/>
+              </a:defRPr>
+            </a:pPr>
+            <a:r>
+              <a:t>      sequencers</a:t>
+            </a:r>
+          </a:p>
+          <a:p>
+            <a:pPr>
+              <a:lnSpc>
+                <a:spcPts val="2200"/>
+              </a:lnSpc>
+              <a:spcAft>
+                <a:spcPts val="1000"/>
+              </a:spcAft>
+              <a:defRPr sz="2000" b="0">
+                <a:solidFill>
+                  <a:srgbClr val="333333"/>
+                </a:solidFill>
+                <a:latin typeface="Calibri"/>
+              </a:defRPr>
+            </a:pPr>
+            <a:r>
+              <a:t>• Create coverage models for functional verification</a:t>
+            </a:r>
+          </a:p>
+          <a:p>
+            <a:pPr>
+              <a:lnSpc>
+                <a:spcPts val="2200"/>
+              </a:lnSpc>
+              <a:spcAft>
+                <a:spcPts val="1000"/>
+              </a:spcAft>
+              <a:defRPr sz="2000" b="0">
+                <a:solidFill>
+                  <a:srgbClr val="333333"/>
+                </a:solidFill>
+                <a:latin typeface="Calibri"/>
+              </a:defRPr>
+            </a:pPr>
+            <a:r>
+              <a:t>• Use advanced configuration with complex objects</a:t>
+            </a:r>
+          </a:p>
+          <a:p>
+            <a:pPr>
+              <a:lnSpc>
+                <a:spcPts val="2200"/>
+              </a:lnSpc>
+              <a:spcAft>
+                <a:spcPts val="1000"/>
+              </a:spcAft>
+              <a:defRPr sz="2000" b="0">
+                <a:solidFill>
+                  <a:srgbClr val="333333"/>
+                </a:solidFill>
+                <a:latin typeface="Calibri"/>
+              </a:defRPr>
+            </a:pPr>
+            <a:r>
+              <a:t>• Implement callbacks for component extension</a:t>
+            </a:r>
+          </a:p>
+          <a:p>
+            <a:pPr>
+              <a:lnSpc>
+                <a:spcPts val="2200"/>
+              </a:lnSpc>
+              <a:spcAft>
+                <a:spcPts val="1000"/>
+              </a:spcAft>
+              <a:defRPr sz="2000" b="0">
+                <a:solidFill>
+                  <a:srgbClr val="333333"/>
+                </a:solidFill>
+                <a:latin typeface="Calibri"/>
+              </a:defRPr>
+            </a:pPr>
+            <a:r>
+              <a:t>• Use register models for register verification</a:t>
+            </a:r>
+          </a:p>
+          <a:p>
+            <a:pPr>
+              <a:lnSpc>
+                <a:spcPts val="2200"/>
+              </a:lnSpc>
+              <a:spcAft>
+                <a:spcPts val="1000"/>
+              </a:spcAft>
+              <a:defRPr sz="2000" b="0">
+                <a:solidFill>
+                  <a:srgbClr val="333333"/>
+                </a:solidFill>
+                <a:latin typeface="Calibri"/>
+              </a:defRPr>
+            </a:pPr>
+            <a:r>
+              <a:t>• Apply advanced UVM patterns in testbenches</a:t>
+            </a:r>
+          </a:p>
+        </p:txBody>
+      </p:sp>
+      <p:sp>
+        <p:nvSpPr>
+          <p:cNvPr id="4" name="TextBox 3"/>
+          <p:cNvSpPr txBox="1"/>
+          <p:nvPr/>
+        </p:nvSpPr>
+        <p:spPr>
+          <a:xfrm>
+            <a:off x="548640" y="6355080"/>
+            <a:ext cx="11064240" cy="320040"/>
+          </a:xfrm>
+          <a:prstGeom prst="rect">
+            <a:avLst/>
+          </a:prstGeom>
+          <a:noFill/>
+        </p:spPr>
+        <p:txBody>
+          <a:bodyPr wrap="square">
+            <a:noAutofit/>
+          </a:bodyPr>
+          <a:lstStyle/>
+          <a:p>
+            <a:pPr algn="r">
+              <a:lnSpc>
+                <a:spcPts val="2200"/>
+              </a:lnSpc>
+              <a:defRPr sz="1000" b="0">
+                <a:solidFill>
+                  <a:srgbClr val="666666"/>
+                </a:solidFill>
+                <a:latin typeface="Calibri"/>
+              </a:defRPr>
+            </a:pPr>
+            <a:r>
+              <a:t>learn_uvm2017_sv_verilator / Module 5</a:t>
+            </a:r>
+          </a:p>
+        </p:txBody>
+      </p:sp>
+    </p:spTree>
+  </p:cSld>
+  <p:clrMapOvr>
+    <a:masterClrMapping/>
+  </p:clrMapOvr>
+</p:sld>
+</file>
+
+<file path=ppt/slides/slide68.xml><?xml version="1.0" encoding="utf-8"?>
+<p:sld xmlns:a="http://schemas.openxmlformats.org/drawingml/2006/main" xmlns:p="http://schemas.openxmlformats.org/presentationml/2006/main" xmlns:r="http://schemas.openxmlformats.org/officeDocument/2006/relationships">
+  <p:cSld>
+    <p:spTree>
+      <p:nvGrpSpPr>
+        <p:cNvPr id="1" name=""/>
+        <p:cNvGrpSpPr/>
+        <p:nvPr/>
+      </p:nvGrpSpPr>
+      <p:grpSpPr/>
+      <p:sp>
+        <p:nvSpPr>
+          <p:cNvPr id="2" name="TextBox 1"/>
+          <p:cNvSpPr txBox="1"/>
+          <p:nvPr/>
+        </p:nvSpPr>
+        <p:spPr>
+          <a:xfrm>
+            <a:off x="548640" y="411480"/>
+            <a:ext cx="11064240" cy="777240"/>
+          </a:xfrm>
+          <a:prstGeom prst="rect">
+            <a:avLst/>
+          </a:prstGeom>
+          <a:noFill/>
+        </p:spPr>
+        <p:txBody>
+          <a:bodyPr wrap="square">
+            <a:noAutofit/>
+          </a:bodyPr>
+          <a:lstStyle/>
+          <a:p>
+            <a:pPr>
+              <a:lnSpc>
+                <a:spcPts val="2200"/>
+              </a:lnSpc>
+              <a:defRPr sz="2800" b="1">
+                <a:solidFill>
+                  <a:srgbClr val="1A1A2E"/>
+                </a:solidFill>
+                <a:latin typeface="Calibri"/>
+              </a:defRPr>
+            </a:pPr>
+            <a:r>
+              <a:t>Exercises</a:t>
+            </a:r>
+          </a:p>
+        </p:txBody>
+      </p:sp>
+      <p:sp>
+        <p:nvSpPr>
+          <p:cNvPr id="3" name="TextBox 2"/>
+          <p:cNvSpPr txBox="1"/>
+          <p:nvPr/>
+        </p:nvSpPr>
+        <p:spPr>
+          <a:xfrm>
+            <a:off x="548640" y="1234440"/>
+            <a:ext cx="11064240" cy="4937760"/>
+          </a:xfrm>
+          <a:prstGeom prst="rect">
+            <a:avLst/>
+          </a:prstGeom>
+          <a:noFill/>
+        </p:spPr>
+        <p:txBody>
+          <a:bodyPr wrap="square">
+            <a:noAutofit/>
+          </a:bodyPr>
+          <a:lstStyle/>
+          <a:p>
+            <a:pPr>
+              <a:lnSpc>
+                <a:spcPts val="2200"/>
+              </a:lnSpc>
+              <a:spcAft>
+                <a:spcPts val="1000"/>
+              </a:spcAft>
+              <a:defRPr sz="2000" b="0">
+                <a:solidFill>
+                  <a:srgbClr val="333333"/>
+                </a:solidFill>
+                <a:latin typeface="Calibri"/>
+              </a:defRPr>
+            </a:pPr>
+            <a:r>
+              <a:t>• Virtual Sequences</a:t>
+            </a:r>
+          </a:p>
+          <a:p>
+            <a:pPr>
+              <a:lnSpc>
+                <a:spcPts val="2200"/>
+              </a:lnSpc>
+              <a:spcAft>
+                <a:spcPts val="1000"/>
+              </a:spcAft>
+              <a:defRPr sz="2000" b="0">
+                <a:solidFill>
+                  <a:srgbClr val="333333"/>
+                </a:solidFill>
+                <a:latin typeface="Calibri"/>
+              </a:defRPr>
+            </a:pPr>
+            <a:r>
+              <a:t>• Coverage Models</a:t>
+            </a:r>
+          </a:p>
+          <a:p>
+            <a:pPr>
+              <a:lnSpc>
+                <a:spcPts val="2200"/>
+              </a:lnSpc>
+              <a:spcAft>
+                <a:spcPts val="1000"/>
+              </a:spcAft>
+              <a:defRPr sz="2000" b="0">
+                <a:solidFill>
+                  <a:srgbClr val="333333"/>
+                </a:solidFill>
+                <a:latin typeface="Calibri"/>
+              </a:defRPr>
+            </a:pPr>
+            <a:r>
+              <a:t>• Advanced Configuration</a:t>
+            </a:r>
+          </a:p>
+          <a:p>
+            <a:pPr>
+              <a:lnSpc>
+                <a:spcPts val="2200"/>
+              </a:lnSpc>
+              <a:spcAft>
+                <a:spcPts val="1000"/>
+              </a:spcAft>
+              <a:defRPr sz="2000" b="0">
+                <a:solidFill>
+                  <a:srgbClr val="333333"/>
+                </a:solidFill>
+                <a:latin typeface="Calibri"/>
+              </a:defRPr>
+            </a:pPr>
+            <a:r>
+              <a:t>• Callbacks</a:t>
+            </a:r>
+          </a:p>
+          <a:p>
+            <a:pPr>
+              <a:lnSpc>
+                <a:spcPts val="2200"/>
+              </a:lnSpc>
+              <a:spcAft>
+                <a:spcPts val="1000"/>
+              </a:spcAft>
+              <a:defRPr sz="2000" b="0">
+                <a:solidFill>
+                  <a:srgbClr val="333333"/>
+                </a:solidFill>
+                <a:latin typeface="Calibri"/>
+              </a:defRPr>
+            </a:pPr>
+            <a:r>
+              <a:t>• Register Model</a:t>
+            </a:r>
+          </a:p>
+        </p:txBody>
+      </p:sp>
+      <p:sp>
+        <p:nvSpPr>
+          <p:cNvPr id="4" name="TextBox 3"/>
+          <p:cNvSpPr txBox="1"/>
+          <p:nvPr/>
+        </p:nvSpPr>
+        <p:spPr>
+          <a:xfrm>
+            <a:off x="548640" y="6355080"/>
+            <a:ext cx="11064240" cy="320040"/>
+          </a:xfrm>
+          <a:prstGeom prst="rect">
+            <a:avLst/>
+          </a:prstGeom>
+          <a:noFill/>
+        </p:spPr>
+        <p:txBody>
+          <a:bodyPr wrap="square">
+            <a:noAutofit/>
+          </a:bodyPr>
+          <a:lstStyle/>
+          <a:p>
+            <a:pPr algn="r">
+              <a:lnSpc>
+                <a:spcPts val="2200"/>
+              </a:lnSpc>
+              <a:defRPr sz="1000" b="0">
+                <a:solidFill>
+                  <a:srgbClr val="666666"/>
+                </a:solidFill>
+                <a:latin typeface="Calibri"/>
+              </a:defRPr>
+            </a:pPr>
+            <a:r>
+              <a:t>learn_uvm2017_sv_verilator / Module 5</a:t>
+            </a:r>
+          </a:p>
+        </p:txBody>
+      </p:sp>
+    </p:spTree>
+  </p:cSld>
+  <p:clrMapOvr>
+    <a:masterClrMapping/>
+  </p:clrMapOvr>
+</p:sld>
+</file>
+
+<file path=ppt/slides/slide69.xml><?xml version="1.0" encoding="utf-8"?>
+<p:sld xmlns:a="http://schemas.openxmlformats.org/drawingml/2006/main" xmlns:p="http://schemas.openxmlformats.org/presentationml/2006/main" xmlns:r="http://schemas.openxmlformats.org/officeDocument/2006/relationships">
+  <p:cSld>
+    <p:spTree>
+      <p:nvGrpSpPr>
+        <p:cNvPr id="1" name=""/>
+        <p:cNvGrpSpPr/>
+        <p:nvPr/>
+      </p:nvGrpSpPr>
+      <p:grpSpPr/>
+      <p:sp>
+        <p:nvSpPr>
+          <p:cNvPr id="2" name="TextBox 1"/>
+          <p:cNvSpPr txBox="1"/>
+          <p:nvPr/>
+        </p:nvSpPr>
+        <p:spPr>
+          <a:xfrm>
+            <a:off x="548640" y="411480"/>
+            <a:ext cx="11064240" cy="777240"/>
+          </a:xfrm>
+          <a:prstGeom prst="rect">
+            <a:avLst/>
+          </a:prstGeom>
+          <a:noFill/>
+        </p:spPr>
+        <p:txBody>
+          <a:bodyPr wrap="square">
+            <a:noAutofit/>
+          </a:bodyPr>
+          <a:lstStyle/>
+          <a:p>
+            <a:pPr>
+              <a:lnSpc>
+                <a:spcPts val="2200"/>
+              </a:lnSpc>
+              <a:defRPr sz="2800" b="1">
+                <a:solidFill>
+                  <a:srgbClr val="1A1A2E"/>
+                </a:solidFill>
+                <a:latin typeface="Calibri"/>
+              </a:defRPr>
+            </a:pPr>
+            <a:r>
+              <a:t>Assessment checklist</a:t>
+            </a:r>
+          </a:p>
+        </p:txBody>
+      </p:sp>
+      <p:sp>
+        <p:nvSpPr>
+          <p:cNvPr id="3" name="TextBox 2"/>
+          <p:cNvSpPr txBox="1"/>
+          <p:nvPr/>
+        </p:nvSpPr>
+        <p:spPr>
+          <a:xfrm>
+            <a:off x="548640" y="1234440"/>
+            <a:ext cx="11064240" cy="4937760"/>
+          </a:xfrm>
+          <a:prstGeom prst="rect">
+            <a:avLst/>
+          </a:prstGeom>
+          <a:noFill/>
+        </p:spPr>
+        <p:txBody>
+          <a:bodyPr wrap="square">
+            <a:noAutofit/>
+          </a:bodyPr>
+          <a:lstStyle/>
+          <a:p>
+            <a:pPr>
+              <a:lnSpc>
+                <a:spcPts val="2200"/>
+              </a:lnSpc>
+              <a:spcAft>
+                <a:spcPts val="1000"/>
+              </a:spcAft>
+              <a:defRPr sz="2000" b="0">
+                <a:solidFill>
+                  <a:srgbClr val="333333"/>
+                </a:solidFill>
+                <a:latin typeface="Calibri"/>
+              </a:defRPr>
+            </a:pPr>
+            <a:r>
+              <a:t>• Can implement virtual sequences</a:t>
+            </a:r>
+          </a:p>
+          <a:p>
+            <a:pPr>
+              <a:lnSpc>
+                <a:spcPts val="2200"/>
+              </a:lnSpc>
+              <a:spcAft>
+                <a:spcPts val="1000"/>
+              </a:spcAft>
+              <a:defRPr sz="2000" b="0">
+                <a:solidFill>
+                  <a:srgbClr val="333333"/>
+                </a:solidFill>
+                <a:latin typeface="Calibri"/>
+              </a:defRPr>
+            </a:pPr>
+            <a:r>
+              <a:t>• Can create coverage models</a:t>
+            </a:r>
+          </a:p>
+          <a:p>
+            <a:pPr>
+              <a:lnSpc>
+                <a:spcPts val="2200"/>
+              </a:lnSpc>
+              <a:spcAft>
+                <a:spcPts val="1000"/>
+              </a:spcAft>
+              <a:defRPr sz="2000" b="0">
+                <a:solidFill>
+                  <a:srgbClr val="333333"/>
+                </a:solidFill>
+                <a:latin typeface="Calibri"/>
+              </a:defRPr>
+            </a:pPr>
+            <a:r>
+              <a:t>• Can use advanced configuration</a:t>
+            </a:r>
+          </a:p>
+          <a:p>
+            <a:pPr>
+              <a:lnSpc>
+                <a:spcPts val="2200"/>
+              </a:lnSpc>
+              <a:spcAft>
+                <a:spcPts val="1000"/>
+              </a:spcAft>
+              <a:defRPr sz="2000" b="0">
+                <a:solidFill>
+                  <a:srgbClr val="333333"/>
+                </a:solidFill>
+                <a:latin typeface="Calibri"/>
+              </a:defRPr>
+            </a:pPr>
+            <a:r>
+              <a:t>• Can implement callbacks</a:t>
+            </a:r>
+          </a:p>
+          <a:p>
+            <a:pPr>
+              <a:lnSpc>
+                <a:spcPts val="2200"/>
+              </a:lnSpc>
+              <a:spcAft>
+                <a:spcPts val="1000"/>
+              </a:spcAft>
+              <a:defRPr sz="2000" b="0">
+                <a:solidFill>
+                  <a:srgbClr val="333333"/>
+                </a:solidFill>
+                <a:latin typeface="Calibri"/>
+              </a:defRPr>
+            </a:pPr>
+            <a:r>
+              <a:t>• Can use register models</a:t>
+            </a:r>
+          </a:p>
+          <a:p>
+            <a:pPr>
+              <a:lnSpc>
+                <a:spcPts val="2200"/>
+              </a:lnSpc>
+              <a:spcAft>
+                <a:spcPts val="1000"/>
+              </a:spcAft>
+              <a:defRPr sz="2000" b="0">
+                <a:solidFill>
+                  <a:srgbClr val="333333"/>
+                </a:solidFill>
+                <a:latin typeface="Calibri"/>
+              </a:defRPr>
+            </a:pPr>
+            <a:r>
+              <a:t>• Understands advanced UVM patterns</a:t>
+            </a:r>
+          </a:p>
+        </p:txBody>
+      </p:sp>
+      <p:sp>
+        <p:nvSpPr>
+          <p:cNvPr id="4" name="TextBox 3"/>
+          <p:cNvSpPr txBox="1"/>
+          <p:nvPr/>
+        </p:nvSpPr>
+        <p:spPr>
+          <a:xfrm>
+            <a:off x="548640" y="6355080"/>
+            <a:ext cx="11064240" cy="320040"/>
+          </a:xfrm>
+          <a:prstGeom prst="rect">
+            <a:avLst/>
+          </a:prstGeom>
+          <a:noFill/>
+        </p:spPr>
+        <p:txBody>
+          <a:bodyPr wrap="square">
+            <a:noAutofit/>
+          </a:bodyPr>
+          <a:lstStyle/>
+          <a:p>
+            <a:pPr algn="r">
+              <a:lnSpc>
+                <a:spcPts val="2200"/>
+              </a:lnSpc>
+              <a:defRPr sz="1000" b="0">
+                <a:solidFill>
+                  <a:srgbClr val="666666"/>
+                </a:solidFill>
+                <a:latin typeface="Calibri"/>
+              </a:defRPr>
+            </a:pPr>
+            <a:r>
+              <a:t>learn_uvm2017_sv_verilator / Module 5</a:t>
+            </a:r>
+          </a:p>
+        </p:txBody>
+      </p:sp>
+    </p:spTree>
+  </p:cSld>
+  <p:clrMapOvr>
+    <a:masterClrMapping/>
+  </p:clrMapOvr>
+</p:sld>
+</file>
+
 <file path=ppt/slides/slide7.xml><?xml version="1.0" encoding="utf-8"?>
 <p:sld xmlns:a="http://schemas.openxmlformats.org/drawingml/2006/main" xmlns:p="http://schemas.openxmlformats.org/presentationml/2006/main" xmlns:r="http://schemas.openxmlformats.org/officeDocument/2006/relationships">
   <p:cSld>
@@ -20004,6 +22770,201 @@
             </a:pPr>
             <a:r>
               <a:t>• Virtual Sequencer Implementation</a:t>
+            </a:r>
+          </a:p>
+        </p:txBody>
+      </p:sp>
+      <p:sp>
+        <p:nvSpPr>
+          <p:cNvPr id="4" name="TextBox 3"/>
+          <p:cNvSpPr txBox="1"/>
+          <p:nvPr/>
+        </p:nvSpPr>
+        <p:spPr>
+          <a:xfrm>
+            <a:off x="548640" y="6355080"/>
+            <a:ext cx="11064240" cy="320040"/>
+          </a:xfrm>
+          <a:prstGeom prst="rect">
+            <a:avLst/>
+          </a:prstGeom>
+          <a:noFill/>
+        </p:spPr>
+        <p:txBody>
+          <a:bodyPr wrap="square">
+            <a:noAutofit/>
+          </a:bodyPr>
+          <a:lstStyle/>
+          <a:p>
+            <a:pPr algn="r">
+              <a:lnSpc>
+                <a:spcPts val="2200"/>
+              </a:lnSpc>
+              <a:defRPr sz="1000" b="0">
+                <a:solidFill>
+                  <a:srgbClr val="666666"/>
+                </a:solidFill>
+                <a:latin typeface="Calibri"/>
+              </a:defRPr>
+            </a:pPr>
+            <a:r>
+              <a:t>learn_uvm2017_sv_verilator / Module 5</a:t>
+            </a:r>
+          </a:p>
+        </p:txBody>
+      </p:sp>
+    </p:spTree>
+  </p:cSld>
+  <p:clrMapOvr>
+    <a:masterClrMapping/>
+  </p:clrMapOvr>
+</p:sld>
+</file>
+
+<file path=ppt/slides/slide70.xml><?xml version="1.0" encoding="utf-8"?>
+<p:sld xmlns:a="http://schemas.openxmlformats.org/drawingml/2006/main" xmlns:p="http://schemas.openxmlformats.org/presentationml/2006/main" xmlns:r="http://schemas.openxmlformats.org/officeDocument/2006/relationships">
+  <p:cSld>
+    <p:spTree>
+      <p:nvGrpSpPr>
+        <p:cNvPr id="1" name=""/>
+        <p:cNvGrpSpPr/>
+        <p:nvPr/>
+      </p:nvGrpSpPr>
+      <p:grpSpPr/>
+      <p:sp>
+        <p:nvSpPr>
+          <p:cNvPr id="2" name="TextBox 1"/>
+          <p:cNvSpPr txBox="1"/>
+          <p:nvPr/>
+        </p:nvSpPr>
+        <p:spPr>
+          <a:xfrm>
+            <a:off x="548640" y="411480"/>
+            <a:ext cx="11064240" cy="777240"/>
+          </a:xfrm>
+          <a:prstGeom prst="rect">
+            <a:avLst/>
+          </a:prstGeom>
+          <a:noFill/>
+        </p:spPr>
+        <p:txBody>
+          <a:bodyPr wrap="square">
+            <a:noAutofit/>
+          </a:bodyPr>
+          <a:lstStyle/>
+          <a:p>
+            <a:pPr>
+              <a:lnSpc>
+                <a:spcPts val="2200"/>
+              </a:lnSpc>
+              <a:defRPr sz="2800" b="1">
+                <a:solidFill>
+                  <a:srgbClr val="1A1A2E"/>
+                </a:solidFill>
+                <a:latin typeface="Calibri"/>
+              </a:defRPr>
+            </a:pPr>
+            <a:r>
+              <a:t>Summary &amp; next steps</a:t>
+            </a:r>
+          </a:p>
+        </p:txBody>
+      </p:sp>
+      <p:sp>
+        <p:nvSpPr>
+          <p:cNvPr id="3" name="TextBox 2"/>
+          <p:cNvSpPr txBox="1"/>
+          <p:nvPr/>
+        </p:nvSpPr>
+        <p:spPr>
+          <a:xfrm>
+            <a:off x="548640" y="1234440"/>
+            <a:ext cx="11064240" cy="4937760"/>
+          </a:xfrm>
+          <a:prstGeom prst="rect">
+            <a:avLst/>
+          </a:prstGeom>
+          <a:noFill/>
+        </p:spPr>
+        <p:txBody>
+          <a:bodyPr wrap="square">
+            <a:noAutofit/>
+          </a:bodyPr>
+          <a:lstStyle/>
+          <a:p>
+            <a:pPr>
+              <a:lnSpc>
+                <a:spcPts val="2200"/>
+              </a:lnSpc>
+              <a:spcAft>
+                <a:spcPts val="1000"/>
+              </a:spcAft>
+              <a:defRPr sz="2000" b="0">
+                <a:solidFill>
+                  <a:srgbClr val="333333"/>
+                </a:solidFill>
+                <a:latin typeface="Calibri"/>
+              </a:defRPr>
+            </a:pPr>
+            <a:r>
+              <a:t>• Master advanced UVM features and patterns</a:t>
+            </a:r>
+          </a:p>
+          <a:p>
+            <a:pPr>
+              <a:lnSpc>
+                <a:spcPts val="2200"/>
+              </a:lnSpc>
+              <a:spcAft>
+                <a:spcPts val="1000"/>
+              </a:spcAft>
+              <a:defRPr sz="2000" b="0">
+                <a:solidFill>
+                  <a:srgbClr val="333333"/>
+                </a:solidFill>
+                <a:latin typeface="Calibri"/>
+              </a:defRPr>
+            </a:pPr>
+            <a:r>
+              <a:t>• Complete module5/CHECKLIST.md</a:t>
+            </a:r>
+          </a:p>
+          <a:p>
+            <a:pPr>
+              <a:lnSpc>
+                <a:spcPts val="2200"/>
+              </a:lnSpc>
+              <a:spcAft>
+                <a:spcPts val="1000"/>
+              </a:spcAft>
+              <a:defRPr sz="2000" b="0">
+                <a:solidFill>
+                  <a:srgbClr val="333333"/>
+                </a:solidFill>
+                <a:latin typeface="Calibri"/>
+              </a:defRPr>
+            </a:pPr>
+            <a:r>
+              <a:t>• Review module5/EXAMPLES.md and run each lab</a:t>
+            </a:r>
+          </a:p>
+          <a:p>
+            <a:pPr>
+              <a:lnSpc>
+                <a:spcPts val="2200"/>
+              </a:lnSpc>
+              <a:spcAft>
+                <a:spcPts val="1000"/>
+              </a:spcAft>
+              <a:defRPr sz="2000" b="0">
+                <a:solidFill>
+                  <a:srgbClr val="333333"/>
+                </a:solidFill>
+                <a:latin typeface="Calibri"/>
+              </a:defRPr>
+            </a:pPr>
+            <a:r>
+              <a:t>• Next: Next module in course</a:t>
             </a:r>
           </a:p>
         </p:txBody>
